--- a/黒崎/AI研修一覧/Gemini/P-02_Workspace_統合実演/スライド.pptx
+++ b/黒崎/AI研修一覧/Gemini/P-02_Workspace_統合実演/スライド.pptx
@@ -1903,8 +1903,8 @@
         </p:nvSpPr>
         <p:spPr>
           <a:xfrm>
-            <a:off x="2743200" y="2240280"/>
-            <a:ext cx="3657600" cy="0"/>
+            <a:off x="3200400" y="2240280"/>
+            <a:ext cx="2743200" cy="0"/>
           </a:xfrm>
           <a:prstGeom prst="line">
             <a:avLst/>
@@ -1953,7 +1953,7 @@
                 <a:ea typeface="Calibri" pitchFamily="34" charset="-122"/>
                 <a:cs typeface="Calibri" pitchFamily="34" charset="-120"/>
               </a:rPr>
-              <a:t>Gemini で効率化する日常業務</a:t>
+              <a:t>実際に動く Gemini を見てみる</a:t>
             </a:r>
             <a:endParaRPr lang="en-US" sz="2000" dirty="0"/>
           </a:p>
@@ -2109,7 +2109,7 @@
                 <a:ea typeface="Calibri" pitchFamily="34" charset="-122"/>
                 <a:cs typeface="Calibri" pitchFamily="34" charset="-120"/>
               </a:rPr>
-              <a:t>CASE STUDY</a:t>
+              <a:t>NEXT STEPS</a:t>
             </a:r>
             <a:endParaRPr lang="en-US" sz="1000" dirty="0"/>
           </a:p>
@@ -2150,7 +2150,7 @@
                 <a:ea typeface="Calibri" pitchFamily="34" charset="-122"/>
                 <a:cs typeface="Calibri" pitchFamily="34" charset="-120"/>
               </a:rPr>
-              <a:t>実装事例: 日本特殊陶業</a:t>
+              <a:t>今からできることは？</a:t>
             </a:r>
             <a:endParaRPr lang="en-US" sz="2400" dirty="0"/>
           </a:p>
@@ -2269,18 +2269,23 @@
         </p:nvSpPr>
         <p:spPr>
           <a:xfrm>
-            <a:off x="685800" y="822960"/>
-            <a:ext cx="7772400" cy="1280160"/>
+            <a:off x="868680" y="914400"/>
+            <a:ext cx="2286000" cy="1828800"/>
           </a:xfrm>
           <a:prstGeom prst="rect">
             <a:avLst>
-              <a:gd name="adj" fmla="val 3571"/>
+              <a:gd name="adj" fmla="val 2500"/>
             </a:avLst>
           </a:prstGeom>
           <a:solidFill>
             <a:srgbClr val="DBEAFE"/>
           </a:solidFill>
-          <a:ln/>
+          <a:ln w="12700">
+            <a:solidFill>
+              <a:srgbClr val="2563EB"/>
+            </a:solidFill>
+            <a:prstDash val="solid"/>
+          </a:ln>
         </p:spPr>
       </p:sp>
       <p:sp>
@@ -2291,22 +2296,22 @@
         </p:nvSpPr>
         <p:spPr>
           <a:xfrm>
-            <a:off x="960120" y="868680"/>
-            <a:ext cx="7223760" cy="274320"/>
-          </a:xfrm>
-          <a:prstGeom prst="rect">
-            <a:avLst/>
-          </a:prstGeom>
-          <a:noFill/>
-          <a:ln/>
-        </p:spPr>
-        <p:txBody>
-          <a:bodyPr wrap="square" rtlCol="0" anchor="ctr">
-            <a:normAutofit/>
-          </a:bodyPr>
-          <a:lstStyle/>
-          <a:p>
-            <a:pPr indent="0" marL="0">
+            <a:off x="868680" y="1143000"/>
+            <a:ext cx="2286000" cy="320040"/>
+          </a:xfrm>
+          <a:prstGeom prst="rect">
+            <a:avLst/>
+          </a:prstGeom>
+          <a:noFill/>
+          <a:ln/>
+        </p:spPr>
+        <p:txBody>
+          <a:bodyPr wrap="square" rtlCol="0" anchor="ctr">
+            <a:normAutofit/>
+          </a:bodyPr>
+          <a:lstStyle/>
+          <a:p>
+            <a:pPr algn="ctr" indent="0" marL="0">
               <a:buNone/>
             </a:pPr>
             <a:r>
@@ -2318,7 +2323,7 @@
                 <a:ea typeface="Calibri" pitchFamily="34" charset="-122"/>
                 <a:cs typeface="Calibri" pitchFamily="34" charset="-120"/>
               </a:rPr>
-              <a:t>15部署 40名のパイロット導入</a:t>
+              <a:t>Step 1</a:t>
             </a:r>
             <a:endParaRPr lang="en-US" sz="1600" dirty="0"/>
           </a:p>
@@ -2332,22 +2337,22 @@
         </p:nvSpPr>
         <p:spPr>
           <a:xfrm>
-            <a:off x="960120" y="1188720"/>
-            <a:ext cx="7223760" cy="822960"/>
-          </a:xfrm>
-          <a:prstGeom prst="rect">
-            <a:avLst/>
-          </a:prstGeom>
-          <a:noFill/>
-          <a:ln/>
-        </p:spPr>
-        <p:txBody>
-          <a:bodyPr wrap="square" rtlCol="0" anchor="ctr">
-            <a:normAutofit/>
-          </a:bodyPr>
-          <a:lstStyle/>
-          <a:p>
-            <a:pPr indent="0" marL="0">
+            <a:off x="1005840" y="1508760"/>
+            <a:ext cx="2011680" cy="1051560"/>
+          </a:xfrm>
+          <a:prstGeom prst="rect">
+            <a:avLst/>
+          </a:prstGeom>
+          <a:noFill/>
+          <a:ln/>
+        </p:spPr>
+        <p:txBody>
+          <a:bodyPr wrap="square" rtlCol="0" anchor="ctr">
+            <a:normAutofit/>
+          </a:bodyPr>
+          <a:lstStyle/>
+          <a:p>
+            <a:pPr algn="ctr" indent="0" marL="0">
               <a:lnSpc>
                 <a:spcPct val="130000"/>
               </a:lnSpc>
@@ -2362,21 +2367,124 @@
                 <a:ea typeface="Calibri" pitchFamily="34" charset="-122"/>
                 <a:cs typeface="Calibri" pitchFamily="34" charset="-120"/>
               </a:rPr>
-              <a:t>メール作成・ファイル検索・議事録作成という3つの業務だけで:</a:t>
+              <a:t>Gmail での返信機能から</a:t>
             </a:r>
             <a:endParaRPr lang="en-US" sz="1400" dirty="0"/>
           </a:p>
           <a:p>
-            <a:pPr indent="0" marL="0">
+            <a:pPr algn="ctr" indent="0" marL="0">
               <a:lnSpc>
                 <a:spcPct val="130000"/>
               </a:lnSpc>
               <a:buNone/>
             </a:pPr>
+            <a:r>
+              <a:rPr lang="en-US" sz="1400" dirty="0">
+                <a:solidFill>
+                  <a:srgbClr val="374151"/>
+                </a:solidFill>
+                <a:latin typeface="Calibri" pitchFamily="34" charset="0"/>
+                <a:ea typeface="Calibri" pitchFamily="34" charset="-122"/>
+                <a:cs typeface="Calibri" pitchFamily="34" charset="-120"/>
+              </a:rPr>
+              <a:t>試してみる</a:t>
+            </a:r>
             <a:endParaRPr lang="en-US" sz="1400" dirty="0"/>
           </a:p>
-          <a:p>
-            <a:pPr indent="0" marL="0">
+        </p:txBody>
+      </p:sp>
+      <p:sp>
+        <p:nvSpPr>
+          <p:cNvPr id="12" name="Shape 10"/>
+          <p:cNvSpPr/>
+          <p:nvPr/>
+        </p:nvSpPr>
+        <p:spPr>
+          <a:xfrm>
+            <a:off x="3429000" y="914400"/>
+            <a:ext cx="2286000" cy="1828800"/>
+          </a:xfrm>
+          <a:prstGeom prst="rect">
+            <a:avLst>
+              <a:gd name="adj" fmla="val 2500"/>
+            </a:avLst>
+          </a:prstGeom>
+          <a:solidFill>
+            <a:srgbClr val="D1FAE5"/>
+          </a:solidFill>
+          <a:ln w="12700">
+            <a:solidFill>
+              <a:srgbClr val="059669"/>
+            </a:solidFill>
+            <a:prstDash val="solid"/>
+          </a:ln>
+        </p:spPr>
+      </p:sp>
+      <p:sp>
+        <p:nvSpPr>
+          <p:cNvPr id="13" name="Text 11"/>
+          <p:cNvSpPr/>
+          <p:nvPr/>
+        </p:nvSpPr>
+        <p:spPr>
+          <a:xfrm>
+            <a:off x="3429000" y="1143000"/>
+            <a:ext cx="2286000" cy="320040"/>
+          </a:xfrm>
+          <a:prstGeom prst="rect">
+            <a:avLst/>
+          </a:prstGeom>
+          <a:noFill/>
+          <a:ln/>
+        </p:spPr>
+        <p:txBody>
+          <a:bodyPr wrap="square" rtlCol="0" anchor="ctr">
+            <a:normAutofit/>
+          </a:bodyPr>
+          <a:lstStyle/>
+          <a:p>
+            <a:pPr algn="ctr" indent="0" marL="0">
+              <a:buNone/>
+            </a:pPr>
+            <a:r>
+              <a:rPr lang="en-US" sz="1600" b="1" dirty="0">
+                <a:solidFill>
+                  <a:srgbClr val="059669"/>
+                </a:solidFill>
+                <a:latin typeface="Calibri" pitchFamily="34" charset="0"/>
+                <a:ea typeface="Calibri" pitchFamily="34" charset="-122"/>
+                <a:cs typeface="Calibri" pitchFamily="34" charset="-120"/>
+              </a:rPr>
+              <a:t>Step 2</a:t>
+            </a:r>
+            <a:endParaRPr lang="en-US" sz="1600" dirty="0"/>
+          </a:p>
+        </p:txBody>
+      </p:sp>
+      <p:sp>
+        <p:nvSpPr>
+          <p:cNvPr id="14" name="Text 12"/>
+          <p:cNvSpPr/>
+          <p:nvPr/>
+        </p:nvSpPr>
+        <p:spPr>
+          <a:xfrm>
+            <a:off x="3566160" y="1508760"/>
+            <a:ext cx="2011680" cy="1051560"/>
+          </a:xfrm>
+          <a:prstGeom prst="rect">
+            <a:avLst/>
+          </a:prstGeom>
+          <a:noFill/>
+          <a:ln/>
+        </p:spPr>
+        <p:txBody>
+          <a:bodyPr wrap="square" rtlCol="0" anchor="ctr">
+            <a:normAutofit/>
+          </a:bodyPr>
+          <a:lstStyle/>
+          <a:p>
+            <a:pPr algn="ctr" indent="0" marL="0">
               <a:lnSpc>
                 <a:spcPct val="130000"/>
               </a:lnSpc>
@@ -2391,21 +2499,124 @@
                 <a:ea typeface="Calibri" pitchFamily="34" charset="-122"/>
                 <a:cs typeface="Calibri" pitchFamily="34" charset="-120"/>
               </a:rPr>
-              <a:t>週あたり 3.1時間 の業務時間削減を実現</a:t>
+              <a:t>よく使う資料を Drive に</a:t>
             </a:r>
             <a:endParaRPr lang="en-US" sz="1400" dirty="0"/>
           </a:p>
           <a:p>
-            <a:pPr indent="0" marL="0">
+            <a:pPr algn="ctr" indent="0" marL="0">
               <a:lnSpc>
                 <a:spcPct val="130000"/>
               </a:lnSpc>
               <a:buNone/>
             </a:pPr>
+            <a:r>
+              <a:rPr lang="en-US" sz="1400" dirty="0">
+                <a:solidFill>
+                  <a:srgbClr val="374151"/>
+                </a:solidFill>
+                <a:latin typeface="Calibri" pitchFamily="34" charset="0"/>
+                <a:ea typeface="Calibri" pitchFamily="34" charset="-122"/>
+                <a:cs typeface="Calibri" pitchFamily="34" charset="-120"/>
+              </a:rPr>
+              <a:t>まとめておく</a:t>
+            </a:r>
             <a:endParaRPr lang="en-US" sz="1400" dirty="0"/>
           </a:p>
-          <a:p>
-            <a:pPr indent="0" marL="0">
+        </p:txBody>
+      </p:sp>
+      <p:sp>
+        <p:nvSpPr>
+          <p:cNvPr id="15" name="Shape 13"/>
+          <p:cNvSpPr/>
+          <p:nvPr/>
+        </p:nvSpPr>
+        <p:spPr>
+          <a:xfrm>
+            <a:off x="5989320" y="914400"/>
+            <a:ext cx="2286000" cy="1828800"/>
+          </a:xfrm>
+          <a:prstGeom prst="rect">
+            <a:avLst>
+              <a:gd name="adj" fmla="val 2500"/>
+            </a:avLst>
+          </a:prstGeom>
+          <a:solidFill>
+            <a:srgbClr val="FEF3C7"/>
+          </a:solidFill>
+          <a:ln w="12700">
+            <a:solidFill>
+              <a:srgbClr val="D97706"/>
+            </a:solidFill>
+            <a:prstDash val="solid"/>
+          </a:ln>
+        </p:spPr>
+      </p:sp>
+      <p:sp>
+        <p:nvSpPr>
+          <p:cNvPr id="16" name="Text 14"/>
+          <p:cNvSpPr/>
+          <p:nvPr/>
+        </p:nvSpPr>
+        <p:spPr>
+          <a:xfrm>
+            <a:off x="5989320" y="1143000"/>
+            <a:ext cx="2286000" cy="320040"/>
+          </a:xfrm>
+          <a:prstGeom prst="rect">
+            <a:avLst/>
+          </a:prstGeom>
+          <a:noFill/>
+          <a:ln/>
+        </p:spPr>
+        <p:txBody>
+          <a:bodyPr wrap="square" rtlCol="0" anchor="ctr">
+            <a:normAutofit/>
+          </a:bodyPr>
+          <a:lstStyle/>
+          <a:p>
+            <a:pPr algn="ctr" indent="0" marL="0">
+              <a:buNone/>
+            </a:pPr>
+            <a:r>
+              <a:rPr lang="en-US" sz="1600" b="1" dirty="0">
+                <a:solidFill>
+                  <a:srgbClr val="D97706"/>
+                </a:solidFill>
+                <a:latin typeface="Calibri" pitchFamily="34" charset="0"/>
+                <a:ea typeface="Calibri" pitchFamily="34" charset="-122"/>
+                <a:cs typeface="Calibri" pitchFamily="34" charset="-120"/>
+              </a:rPr>
+              <a:t>Step 3</a:t>
+            </a:r>
+            <a:endParaRPr lang="en-US" sz="1600" dirty="0"/>
+          </a:p>
+        </p:txBody>
+      </p:sp>
+      <p:sp>
+        <p:nvSpPr>
+          <p:cNvPr id="17" name="Text 15"/>
+          <p:cNvSpPr/>
+          <p:nvPr/>
+        </p:nvSpPr>
+        <p:spPr>
+          <a:xfrm>
+            <a:off x="6126480" y="1508760"/>
+            <a:ext cx="2011680" cy="1051560"/>
+          </a:xfrm>
+          <a:prstGeom prst="rect">
+            <a:avLst/>
+          </a:prstGeom>
+          <a:noFill/>
+          <a:ln/>
+        </p:spPr>
+        <p:txBody>
+          <a:bodyPr wrap="square" rtlCol="0" anchor="ctr">
+            <a:normAutofit/>
+          </a:bodyPr>
+          <a:lstStyle/>
+          <a:p>
+            <a:pPr algn="ctr" indent="0" marL="0">
               <a:lnSpc>
                 <a:spcPct val="130000"/>
               </a:lnSpc>
@@ -2420,72 +2631,29 @@
                 <a:ea typeface="Calibri" pitchFamily="34" charset="-122"/>
                 <a:cs typeface="Calibri" pitchFamily="34" charset="-120"/>
               </a:rPr>
-              <a:t>全社展開時にはさらに大きな効果が期待される</a:t>
+              <a:t>生成されたメール・資料を</a:t>
             </a:r>
             <a:endParaRPr lang="en-US" sz="1400" dirty="0"/>
           </a:p>
-        </p:txBody>
-      </p:sp>
-      <p:sp>
-        <p:nvSpPr>
-          <p:cNvPr id="12" name="Shape 10"/>
-          <p:cNvSpPr/>
-          <p:nvPr/>
-        </p:nvSpPr>
-        <p:spPr>
-          <a:xfrm>
-            <a:off x="685800" y="3200400"/>
-            <a:ext cx="7772400" cy="365760"/>
-          </a:xfrm>
-          <a:prstGeom prst="rect">
-            <a:avLst>
-              <a:gd name="adj" fmla="val 10000"/>
-            </a:avLst>
-          </a:prstGeom>
-          <a:solidFill>
-            <a:srgbClr val="DBEAFE"/>
-          </a:solidFill>
-          <a:ln/>
-        </p:spPr>
-      </p:sp>
-      <p:sp>
-        <p:nvSpPr>
-          <p:cNvPr id="13" name="Text 11"/>
-          <p:cNvSpPr/>
-          <p:nvPr/>
-        </p:nvSpPr>
-        <p:spPr>
-          <a:xfrm>
-            <a:off x="822960" y="3200400"/>
-            <a:ext cx="7498080" cy="365760"/>
-          </a:xfrm>
-          <a:prstGeom prst="rect">
-            <a:avLst/>
-          </a:prstGeom>
-          <a:noFill/>
-          <a:ln/>
-        </p:spPr>
-        <p:txBody>
-          <a:bodyPr wrap="square" rtlCol="0" anchor="ctr">
-            <a:normAutofit/>
-          </a:bodyPr>
-          <a:lstStyle/>
-          <a:p>
-            <a:pPr indent="0" marL="0">
-              <a:buNone/>
-            </a:pPr>
-            <a:r>
-              <a:rPr lang="en-US" sz="1200" i="1" dirty="0">
-                <a:solidFill>
-                  <a:srgbClr val="6B7280"/>
-                </a:solidFill>
-                <a:latin typeface="Calibri" pitchFamily="34" charset="0"/>
-                <a:ea typeface="Calibri" pitchFamily="34" charset="-122"/>
-                <a:cs typeface="Calibri" pitchFamily="34" charset="-120"/>
-              </a:rPr>
-              <a:t>全社平均では従業員1人あたり年間 200時間 の業務時間削減が見込める</a:t>
-            </a:r>
-            <a:endParaRPr lang="en-US" sz="1200" dirty="0"/>
+          <a:p>
+            <a:pPr algn="ctr" indent="0" marL="0">
+              <a:lnSpc>
+                <a:spcPct val="130000"/>
+              </a:lnSpc>
+              <a:buNone/>
+            </a:pPr>
+            <a:r>
+              <a:rPr lang="en-US" sz="1400" dirty="0">
+                <a:solidFill>
+                  <a:srgbClr val="374151"/>
+                </a:solidFill>
+                <a:latin typeface="Calibri" pitchFamily="34" charset="0"/>
+                <a:ea typeface="Calibri" pitchFamily="34" charset="-122"/>
+                <a:cs typeface="Calibri" pitchFamily="34" charset="-120"/>
+              </a:rPr>
+              <a:t>レビューして改善する</a:t>
+            </a:r>
+            <a:endParaRPr lang="en-US" sz="1400" dirty="0"/>
           </a:p>
         </p:txBody>
       </p:sp>
@@ -2556,7 +2724,7 @@
                 <a:ea typeface="Calibri" pitchFamily="34" charset="-122"/>
                 <a:cs typeface="Calibri" pitchFamily="34" charset="-120"/>
               </a:rPr>
-              <a:t>AI と人間の協働が鍵</a:t>
+              <a:t>まとめ</a:t>
             </a:r>
             <a:endParaRPr lang="en-US" sz="2400" dirty="0"/>
           </a:p>
@@ -2640,7 +2808,7 @@
                 <a:ea typeface="Calibri" pitchFamily="34" charset="-122"/>
                 <a:cs typeface="Calibri" pitchFamily="34" charset="-120"/>
               </a:rPr>
-              <a:t>Gemini は最初のドラフトや案出しを高速化するもの</a:t>
+              <a:t>Gmail × Drive の統合により、メール作成が劇的に効率化される</a:t>
             </a:r>
             <a:endParaRPr lang="en-US" sz="1600" dirty="0"/>
           </a:p>
@@ -2724,7 +2892,7 @@
                 <a:ea typeface="Calibri" pitchFamily="34" charset="-122"/>
                 <a:cs typeface="Calibri" pitchFamily="34" charset="-120"/>
               </a:rPr>
-              <a:t>生成されたメール・ドキュメント・議事録は自分で確認・修正が必須</a:t>
+              <a:t>AI が生成した案を『確認・微調整』する『人間の目』が重要</a:t>
             </a:r>
             <a:endParaRPr lang="en-US" sz="1600" dirty="0"/>
           </a:p>
@@ -2808,7 +2976,7 @@
                 <a:ea typeface="Calibri" pitchFamily="34" charset="-122"/>
                 <a:cs typeface="Calibri" pitchFamily="34" charset="-120"/>
               </a:rPr>
-              <a:t>AI と人間が協働することで、効率性と品質を両立させる</a:t>
+              <a:t>小さく始めて、成功事例を社内で共有することが導入成功の鍵</a:t>
             </a:r>
             <a:endParaRPr lang="en-US" sz="1600" dirty="0"/>
           </a:p>
@@ -2881,6 +3049,47 @@
       <p:sp>
         <p:nvSpPr>
           <p:cNvPr id="11" name="Text 9"/>
+          <p:cNvSpPr/>
+          <p:nvPr/>
+        </p:nvSpPr>
+        <p:spPr>
+          <a:xfrm>
+            <a:off x="685800" y="4796028"/>
+            <a:ext cx="1828800" cy="274320"/>
+          </a:xfrm>
+          <a:prstGeom prst="rect">
+            <a:avLst/>
+          </a:prstGeom>
+          <a:noFill/>
+          <a:ln/>
+        </p:spPr>
+        <p:txBody>
+          <a:bodyPr wrap="square" rtlCol="0" anchor="ctr">
+            <a:normAutofit/>
+          </a:bodyPr>
+          <a:lstStyle/>
+          <a:p>
+            <a:pPr algn="l" indent="0" marL="0">
+              <a:buNone/>
+            </a:pPr>
+            <a:r>
+              <a:rPr lang="en-US" sz="1000" dirty="0">
+                <a:solidFill>
+                  <a:srgbClr val="9CA3AF"/>
+                </a:solidFill>
+                <a:latin typeface="Calibri" pitchFamily="34" charset="0"/>
+                <a:ea typeface="Calibri" pitchFamily="34" charset="-122"/>
+                <a:cs typeface="Calibri" pitchFamily="34" charset="-120"/>
+              </a:rPr>
+              <a:t>P-02</a:t>
+            </a:r>
+            <a:endParaRPr lang="en-US" sz="1000" dirty="0"/>
+          </a:p>
+        </p:txBody>
+      </p:sp>
+      <p:sp>
+        <p:nvSpPr>
+          <p:cNvPr id="12" name="Text 10"/>
           <p:cNvSpPr/>
           <p:nvPr/>
         </p:nvSpPr>
@@ -3000,8 +3209,8 @@
         </p:nvSpPr>
         <p:spPr>
           <a:xfrm>
-            <a:off x="2743200" y="2423160"/>
-            <a:ext cx="3657600" cy="0"/>
+            <a:off x="3200400" y="2423160"/>
+            <a:ext cx="2743200" cy="0"/>
           </a:xfrm>
           <a:prstGeom prst="line">
             <a:avLst/>
@@ -3050,7 +3259,7 @@
                 <a:ea typeface="Calibri" pitchFamily="34" charset="-122"/>
                 <a:cs typeface="Calibri" pitchFamily="34" charset="-120"/>
               </a:rPr>
-              <a:t>Google Workspace で仕事の質を上げよう</a:t>
+              <a:t>実演で見えた、Workspace 統合の力</a:t>
             </a:r>
             <a:endParaRPr lang="en-US" sz="2000" dirty="0"/>
           </a:p>
@@ -3091,7 +3300,7 @@
                 <a:ea typeface="Calibri" pitchFamily="34" charset="-122"/>
                 <a:cs typeface="Calibri" pitchFamily="34" charset="-120"/>
               </a:rPr>
-              <a:t>NEXT → P-03 Gmail・Meet 実装ガイド</a:t>
+              <a:t>NEXT → P-03 営業企画効率化実演</a:t>
             </a:r>
             <a:endParaRPr lang="en-US" sz="1200" dirty="0"/>
           </a:p>
@@ -3373,7 +3582,7 @@
                 <a:ea typeface="Calibri" pitchFamily="34" charset="-122"/>
                 <a:cs typeface="Calibri" pitchFamily="34" charset="-120"/>
               </a:rPr>
-              <a:t>Gmail・ドライブ・Meet 内での Gemini 統合機能の概要を説明できる</a:t>
+              <a:t>Gmail での自動メール生成機能を実際に見て理解する</a:t>
             </a:r>
             <a:endParaRPr lang="en-US" sz="1600" dirty="0"/>
           </a:p>
@@ -3480,7 +3689,7 @@
                 <a:ea typeface="Calibri" pitchFamily="34" charset="-122"/>
                 <a:cs typeface="Calibri" pitchFamily="34" charset="-120"/>
               </a:rPr>
-              <a:t>Gemini が Google Workspace でどのような実務支援ができるか具体的に理解できる</a:t>
+              <a:t>Google ドライブからの情報活用・カスタマイズの流れを把握する</a:t>
             </a:r>
             <a:endParaRPr lang="en-US" sz="1600" dirty="0"/>
           </a:p>
@@ -3587,7 +3796,7 @@
                 <a:ea typeface="Calibri" pitchFamily="34" charset="-122"/>
                 <a:cs typeface="Calibri" pitchFamily="34" charset="-120"/>
               </a:rPr>
-              <a:t>メール自動生成やドライブ情報の活用など、実演を通じて基本操作を習得できる</a:t>
+              <a:t>実演を通じて Gemini との『対話』の実際を習得する</a:t>
             </a:r>
             <a:endParaRPr lang="en-US" sz="1600" dirty="0"/>
           </a:p>
@@ -3654,7 +3863,7 @@
         <p:spPr>
           <a:xfrm>
             <a:off x="685800" y="137160"/>
-            <a:ext cx="1463040" cy="256032"/>
+            <a:ext cx="1682496" cy="256032"/>
           </a:xfrm>
           <a:prstGeom prst="rect">
             <a:avLst>
@@ -3676,7 +3885,7 @@
         <p:spPr>
           <a:xfrm>
             <a:off x="685800" y="137160"/>
-            <a:ext cx="1463040" cy="256032"/>
+            <a:ext cx="1682496" cy="256032"/>
           </a:xfrm>
           <a:prstGeom prst="rect">
             <a:avLst/>
@@ -3702,7 +3911,7 @@
                 <a:ea typeface="Calibri" pitchFamily="34" charset="-122"/>
                 <a:cs typeface="Calibri" pitchFamily="34" charset="-120"/>
               </a:rPr>
-              <a:t>BACKGROUND</a:t>
+              <a:t>GMAIL BASICS</a:t>
             </a:r>
             <a:endParaRPr lang="en-US" sz="1000" dirty="0"/>
           </a:p>
@@ -3743,7 +3952,7 @@
                 <a:ea typeface="Calibri" pitchFamily="34" charset="-122"/>
                 <a:cs typeface="Calibri" pitchFamily="34" charset="-120"/>
               </a:rPr>
-              <a:t>毎日の業務課題</a:t>
+              <a:t>Gmail × Gemini の3つの活用法</a:t>
             </a:r>
             <a:endParaRPr lang="en-US" sz="2400" dirty="0"/>
           </a:p>
@@ -3862,20 +4071,20 @@
         </p:nvSpPr>
         <p:spPr>
           <a:xfrm>
-            <a:off x="868680" y="914400"/>
-            <a:ext cx="2286000" cy="1828800"/>
+            <a:off x="685800" y="914400"/>
+            <a:ext cx="7772400" cy="822960"/>
           </a:xfrm>
           <a:prstGeom prst="rect">
             <a:avLst>
-              <a:gd name="adj" fmla="val 2500"/>
+              <a:gd name="adj" fmla="val 5556"/>
             </a:avLst>
           </a:prstGeom>
           <a:solidFill>
-            <a:srgbClr val="DBEAFE"/>
+            <a:srgbClr val="FAFBFC"/>
           </a:solidFill>
-          <a:ln w="12700">
+          <a:ln w="6350">
             <a:solidFill>
-              <a:srgbClr val="2563EB"/>
+              <a:srgbClr val="E5E7EB"/>
             </a:solidFill>
             <a:prstDash val="solid"/>
           </a:ln>
@@ -3889,22 +4098,22 @@
         </p:nvSpPr>
         <p:spPr>
           <a:xfrm>
-            <a:off x="868680" y="1143000"/>
-            <a:ext cx="2286000" cy="320040"/>
-          </a:xfrm>
-          <a:prstGeom prst="rect">
-            <a:avLst/>
-          </a:prstGeom>
-          <a:noFill/>
-          <a:ln/>
-        </p:spPr>
-        <p:txBody>
-          <a:bodyPr wrap="square" rtlCol="0" anchor="ctr">
-            <a:normAutofit/>
-          </a:bodyPr>
-          <a:lstStyle/>
-          <a:p>
-            <a:pPr algn="ctr" indent="0" marL="0">
+            <a:off x="960120" y="960120"/>
+            <a:ext cx="2743200" cy="320040"/>
+          </a:xfrm>
+          <a:prstGeom prst="rect">
+            <a:avLst/>
+          </a:prstGeom>
+          <a:noFill/>
+          <a:ln/>
+        </p:spPr>
+        <p:txBody>
+          <a:bodyPr wrap="square" rtlCol="0" anchor="ctr">
+            <a:normAutofit/>
+          </a:bodyPr>
+          <a:lstStyle/>
+          <a:p>
+            <a:pPr indent="0" marL="0">
               <a:buNone/>
             </a:pPr>
             <a:r>
@@ -3916,27 +4125,10 @@
                 <a:ea typeface="Calibri" pitchFamily="34" charset="-122"/>
                 <a:cs typeface="Calibri" pitchFamily="34" charset="-120"/>
               </a:rPr>
-              <a:t>メール返信</a:t>
+              <a:t>① 返信ドラフト自動生成</a:t>
             </a:r>
             <a:endParaRPr lang="en-US" sz="1600" dirty="0"/>
           </a:p>
-          <a:p>
-            <a:pPr algn="ctr" indent="0" marL="0">
-              <a:buNone/>
-            </a:pPr>
-            <a:r>
-              <a:rPr lang="en-US" sz="1600" b="1" dirty="0">
-                <a:solidFill>
-                  <a:srgbClr val="2563EB"/>
-                </a:solidFill>
-                <a:latin typeface="Calibri" pitchFamily="34" charset="0"/>
-                <a:ea typeface="Calibri" pitchFamily="34" charset="-122"/>
-                <a:cs typeface="Calibri" pitchFamily="34" charset="-120"/>
-              </a:rPr>
-              <a:t>数時間</a:t>
-            </a:r>
-            <a:endParaRPr lang="en-US" sz="1600" dirty="0"/>
-          </a:p>
         </p:txBody>
       </p:sp>
       <p:sp>
@@ -3947,25 +4139,22 @@
         </p:nvSpPr>
         <p:spPr>
           <a:xfrm>
-            <a:off x="1005840" y="1508760"/>
-            <a:ext cx="2011680" cy="1051560"/>
-          </a:xfrm>
-          <a:prstGeom prst="rect">
-            <a:avLst/>
-          </a:prstGeom>
-          <a:noFill/>
-          <a:ln/>
-        </p:spPr>
-        <p:txBody>
-          <a:bodyPr wrap="square" rtlCol="0" anchor="ctr">
-            <a:normAutofit/>
-          </a:bodyPr>
-          <a:lstStyle/>
-          <a:p>
-            <a:pPr algn="ctr" indent="0" marL="0">
-              <a:lnSpc>
-                <a:spcPct val="130000"/>
-              </a:lnSpc>
+            <a:off x="960120" y="1280160"/>
+            <a:ext cx="6858000" cy="320040"/>
+          </a:xfrm>
+          <a:prstGeom prst="rect">
+            <a:avLst/>
+          </a:prstGeom>
+          <a:noFill/>
+          <a:ln/>
+        </p:spPr>
+        <p:txBody>
+          <a:bodyPr wrap="square" rtlCol="0" anchor="ctr">
+            <a:normAutofit/>
+          </a:bodyPr>
+          <a:lstStyle/>
+          <a:p>
+            <a:pPr indent="0" marL="0">
               <a:buNone/>
             </a:pPr>
             <a:r>
@@ -3977,30 +4166,10 @@
                 <a:ea typeface="Calibri" pitchFamily="34" charset="-122"/>
                 <a:cs typeface="Calibri" pitchFamily="34" charset="-120"/>
               </a:rPr>
-              <a:t>1日のメール処理に</a:t>
+              <a:t>受信メールに対して、Gemini が返信案を自動作成</a:t>
             </a:r>
             <a:endParaRPr lang="en-US" sz="1400" dirty="0"/>
           </a:p>
-          <a:p>
-            <a:pPr algn="ctr" indent="0" marL="0">
-              <a:lnSpc>
-                <a:spcPct val="130000"/>
-              </a:lnSpc>
-              <a:buNone/>
-            </a:pPr>
-            <a:r>
-              <a:rPr lang="en-US" sz="1400" dirty="0">
-                <a:solidFill>
-                  <a:srgbClr val="374151"/>
-                </a:solidFill>
-                <a:latin typeface="Calibri" pitchFamily="34" charset="0"/>
-                <a:ea typeface="Calibri" pitchFamily="34" charset="-122"/>
-                <a:cs typeface="Calibri" pitchFamily="34" charset="-120"/>
-              </a:rPr>
-              <a:t>あふれている時間</a:t>
-            </a:r>
-            <a:endParaRPr lang="en-US" sz="1400" dirty="0"/>
-          </a:p>
         </p:txBody>
       </p:sp>
       <p:sp>
@@ -4011,20 +4180,20 @@
         </p:nvSpPr>
         <p:spPr>
           <a:xfrm>
-            <a:off x="3429000" y="914400"/>
-            <a:ext cx="2286000" cy="1828800"/>
+            <a:off x="685800" y="1920240"/>
+            <a:ext cx="7772400" cy="822960"/>
           </a:xfrm>
           <a:prstGeom prst="rect">
             <a:avLst>
-              <a:gd name="adj" fmla="val 2500"/>
+              <a:gd name="adj" fmla="val 5556"/>
             </a:avLst>
           </a:prstGeom>
           <a:solidFill>
-            <a:srgbClr val="FEE2E2"/>
+            <a:srgbClr val="FAFBFC"/>
           </a:solidFill>
-          <a:ln w="12700">
+          <a:ln w="6350">
             <a:solidFill>
-              <a:srgbClr val="DC2626"/>
+              <a:srgbClr val="E5E7EB"/>
             </a:solidFill>
             <a:prstDash val="solid"/>
           </a:ln>
@@ -4038,54 +4207,37 @@
         </p:nvSpPr>
         <p:spPr>
           <a:xfrm>
-            <a:off x="3429000" y="1143000"/>
-            <a:ext cx="2286000" cy="320040"/>
-          </a:xfrm>
-          <a:prstGeom prst="rect">
-            <a:avLst/>
-          </a:prstGeom>
-          <a:noFill/>
-          <a:ln/>
-        </p:spPr>
-        <p:txBody>
-          <a:bodyPr wrap="square" rtlCol="0" anchor="ctr">
-            <a:normAutofit/>
-          </a:bodyPr>
-          <a:lstStyle/>
-          <a:p>
-            <a:pPr algn="ctr" indent="0" marL="0">
+            <a:off x="960120" y="1965960"/>
+            <a:ext cx="2743200" cy="320040"/>
+          </a:xfrm>
+          <a:prstGeom prst="rect">
+            <a:avLst/>
+          </a:prstGeom>
+          <a:noFill/>
+          <a:ln/>
+        </p:spPr>
+        <p:txBody>
+          <a:bodyPr wrap="square" rtlCol="0" anchor="ctr">
+            <a:normAutofit/>
+          </a:bodyPr>
+          <a:lstStyle/>
+          <a:p>
+            <a:pPr indent="0" marL="0">
               <a:buNone/>
             </a:pPr>
             <a:r>
               <a:rPr lang="en-US" sz="1600" b="1" dirty="0">
                 <a:solidFill>
-                  <a:srgbClr val="DC2626"/>
-                </a:solidFill>
-                <a:latin typeface="Calibri" pitchFamily="34" charset="0"/>
-                <a:ea typeface="Calibri" pitchFamily="34" charset="-122"/>
-                <a:cs typeface="Calibri" pitchFamily="34" charset="-120"/>
-              </a:rPr>
-              <a:t>ファイル探索</a:t>
+                  <a:srgbClr val="2563EB"/>
+                </a:solidFill>
+                <a:latin typeface="Calibri" pitchFamily="34" charset="0"/>
+                <a:ea typeface="Calibri" pitchFamily="34" charset="-122"/>
+                <a:cs typeface="Calibri" pitchFamily="34" charset="-120"/>
+              </a:rPr>
+              <a:t>② メール分類・優先度付け</a:t>
             </a:r>
             <a:endParaRPr lang="en-US" sz="1600" dirty="0"/>
           </a:p>
-          <a:p>
-            <a:pPr algn="ctr" indent="0" marL="0">
-              <a:buNone/>
-            </a:pPr>
-            <a:r>
-              <a:rPr lang="en-US" sz="1600" b="1" dirty="0">
-                <a:solidFill>
-                  <a:srgbClr val="DC2626"/>
-                </a:solidFill>
-                <a:latin typeface="Calibri" pitchFamily="34" charset="0"/>
-                <a:ea typeface="Calibri" pitchFamily="34" charset="-122"/>
-                <a:cs typeface="Calibri" pitchFamily="34" charset="-120"/>
-              </a:rPr>
-              <a:t>迷路</a:t>
-            </a:r>
-            <a:endParaRPr lang="en-US" sz="1600" dirty="0"/>
-          </a:p>
         </p:txBody>
       </p:sp>
       <p:sp>
@@ -4096,25 +4248,22 @@
         </p:nvSpPr>
         <p:spPr>
           <a:xfrm>
-            <a:off x="3566160" y="1508760"/>
-            <a:ext cx="2011680" cy="1051560"/>
-          </a:xfrm>
-          <a:prstGeom prst="rect">
-            <a:avLst/>
-          </a:prstGeom>
-          <a:noFill/>
-          <a:ln/>
-        </p:spPr>
-        <p:txBody>
-          <a:bodyPr wrap="square" rtlCol="0" anchor="ctr">
-            <a:normAutofit/>
-          </a:bodyPr>
-          <a:lstStyle/>
-          <a:p>
-            <a:pPr algn="ctr" indent="0" marL="0">
-              <a:lnSpc>
-                <a:spcPct val="130000"/>
-              </a:lnSpc>
+            <a:off x="960120" y="2286000"/>
+            <a:ext cx="6858000" cy="320040"/>
+          </a:xfrm>
+          <a:prstGeom prst="rect">
+            <a:avLst/>
+          </a:prstGeom>
+          <a:noFill/>
+          <a:ln/>
+        </p:spPr>
+        <p:txBody>
+          <a:bodyPr wrap="square" rtlCol="0" anchor="ctr">
+            <a:normAutofit/>
+          </a:bodyPr>
+          <a:lstStyle/>
+          <a:p>
+            <a:pPr indent="0" marL="0">
               <a:buNone/>
             </a:pPr>
             <a:r>
@@ -4126,30 +4275,10 @@
                 <a:ea typeface="Calibri" pitchFamily="34" charset="-122"/>
                 <a:cs typeface="Calibri" pitchFamily="34" charset="-120"/>
               </a:rPr>
-              <a:t>必要なファイルを見つけるのに</a:t>
+              <a:t>受信トレイを自動分類。重要メールが一目で分かる</a:t>
             </a:r>
             <a:endParaRPr lang="en-US" sz="1400" dirty="0"/>
           </a:p>
-          <a:p>
-            <a:pPr algn="ctr" indent="0" marL="0">
-              <a:lnSpc>
-                <a:spcPct val="130000"/>
-              </a:lnSpc>
-              <a:buNone/>
-            </a:pPr>
-            <a:r>
-              <a:rPr lang="en-US" sz="1400" dirty="0">
-                <a:solidFill>
-                  <a:srgbClr val="374151"/>
-                </a:solidFill>
-                <a:latin typeface="Calibri" pitchFamily="34" charset="0"/>
-                <a:ea typeface="Calibri" pitchFamily="34" charset="-122"/>
-                <a:cs typeface="Calibri" pitchFamily="34" charset="-120"/>
-              </a:rPr>
-              <a:t>フォルダを掘り下げる</a:t>
-            </a:r>
-            <a:endParaRPr lang="en-US" sz="1400" dirty="0"/>
-          </a:p>
         </p:txBody>
       </p:sp>
       <p:sp>
@@ -4160,20 +4289,20 @@
         </p:nvSpPr>
         <p:spPr>
           <a:xfrm>
-            <a:off x="5989320" y="914400"/>
-            <a:ext cx="2286000" cy="1828800"/>
+            <a:off x="685800" y="2926080"/>
+            <a:ext cx="7772400" cy="822960"/>
           </a:xfrm>
           <a:prstGeom prst="rect">
             <a:avLst>
-              <a:gd name="adj" fmla="val 2500"/>
+              <a:gd name="adj" fmla="val 5556"/>
             </a:avLst>
           </a:prstGeom>
           <a:solidFill>
-            <a:srgbClr val="FEF3C7"/>
+            <a:srgbClr val="FAFBFC"/>
           </a:solidFill>
-          <a:ln w="12700">
+          <a:ln w="6350">
             <a:solidFill>
-              <a:srgbClr val="D97706"/>
+              <a:srgbClr val="E5E7EB"/>
             </a:solidFill>
             <a:prstDash val="solid"/>
           </a:ln>
@@ -4187,54 +4316,37 @@
         </p:nvSpPr>
         <p:spPr>
           <a:xfrm>
-            <a:off x="5989320" y="1143000"/>
-            <a:ext cx="2286000" cy="320040"/>
-          </a:xfrm>
-          <a:prstGeom prst="rect">
-            <a:avLst/>
-          </a:prstGeom>
-          <a:noFill/>
-          <a:ln/>
-        </p:spPr>
-        <p:txBody>
-          <a:bodyPr wrap="square" rtlCol="0" anchor="ctr">
-            <a:normAutofit/>
-          </a:bodyPr>
-          <a:lstStyle/>
-          <a:p>
-            <a:pPr algn="ctr" indent="0" marL="0">
+            <a:off x="960120" y="2971800"/>
+            <a:ext cx="2743200" cy="320040"/>
+          </a:xfrm>
+          <a:prstGeom prst="rect">
+            <a:avLst/>
+          </a:prstGeom>
+          <a:noFill/>
+          <a:ln/>
+        </p:spPr>
+        <p:txBody>
+          <a:bodyPr wrap="square" rtlCol="0" anchor="ctr">
+            <a:normAutofit/>
+          </a:bodyPr>
+          <a:lstStyle/>
+          <a:p>
+            <a:pPr indent="0" marL="0">
               <a:buNone/>
             </a:pPr>
             <a:r>
               <a:rPr lang="en-US" sz="1600" b="1" dirty="0">
                 <a:solidFill>
-                  <a:srgbClr val="D97706"/>
-                </a:solidFill>
-                <a:latin typeface="Calibri" pitchFamily="34" charset="0"/>
-                <a:ea typeface="Calibri" pitchFamily="34" charset="-122"/>
-                <a:cs typeface="Calibri" pitchFamily="34" charset="-120"/>
-              </a:rPr>
-              <a:t>議事録作成</a:t>
+                  <a:srgbClr val="2563EB"/>
+                </a:solidFill>
+                <a:latin typeface="Calibri" pitchFamily="34" charset="0"/>
+                <a:ea typeface="Calibri" pitchFamily="34" charset="-122"/>
+                <a:cs typeface="Calibri" pitchFamily="34" charset="-120"/>
+              </a:rPr>
+              <a:t>③ 要約・重要ポイント抽出</a:t>
             </a:r>
             <a:endParaRPr lang="en-US" sz="1600" dirty="0"/>
           </a:p>
-          <a:p>
-            <a:pPr algn="ctr" indent="0" marL="0">
-              <a:buNone/>
-            </a:pPr>
-            <a:r>
-              <a:rPr lang="en-US" sz="1600" b="1" dirty="0">
-                <a:solidFill>
-                  <a:srgbClr val="D97706"/>
-                </a:solidFill>
-                <a:latin typeface="Calibri" pitchFamily="34" charset="0"/>
-                <a:ea typeface="Calibri" pitchFamily="34" charset="-122"/>
-                <a:cs typeface="Calibri" pitchFamily="34" charset="-120"/>
-              </a:rPr>
-              <a:t>手動作業</a:t>
-            </a:r>
-            <a:endParaRPr lang="en-US" sz="1600" dirty="0"/>
-          </a:p>
         </p:txBody>
       </p:sp>
       <p:sp>
@@ -4245,25 +4357,22 @@
         </p:nvSpPr>
         <p:spPr>
           <a:xfrm>
-            <a:off x="6126480" y="1508760"/>
-            <a:ext cx="2011680" cy="1051560"/>
-          </a:xfrm>
-          <a:prstGeom prst="rect">
-            <a:avLst/>
-          </a:prstGeom>
-          <a:noFill/>
-          <a:ln/>
-        </p:spPr>
-        <p:txBody>
-          <a:bodyPr wrap="square" rtlCol="0" anchor="ctr">
-            <a:normAutofit/>
-          </a:bodyPr>
-          <a:lstStyle/>
-          <a:p>
-            <a:pPr algn="ctr" indent="0" marL="0">
-              <a:lnSpc>
-                <a:spcPct val="130000"/>
-              </a:lnSpc>
+            <a:off x="960120" y="3291840"/>
+            <a:ext cx="6858000" cy="320040"/>
+          </a:xfrm>
+          <a:prstGeom prst="rect">
+            <a:avLst/>
+          </a:prstGeom>
+          <a:noFill/>
+          <a:ln/>
+        </p:spPr>
+        <p:txBody>
+          <a:bodyPr wrap="square" rtlCol="0" anchor="ctr">
+            <a:normAutofit/>
+          </a:bodyPr>
+          <a:lstStyle/>
+          <a:p>
+            <a:pPr indent="0" marL="0">
               <a:buNone/>
             </a:pPr>
             <a:r>
@@ -4275,92 +4384,9 @@
                 <a:ea typeface="Calibri" pitchFamily="34" charset="-122"/>
                 <a:cs typeface="Calibri" pitchFamily="34" charset="-120"/>
               </a:rPr>
-              <a:t>会議記録を手で整理</a:t>
+              <a:t>長いメールスレッドを AI が自動要約</a:t>
             </a:r>
             <a:endParaRPr lang="en-US" sz="1400" dirty="0"/>
-          </a:p>
-          <a:p>
-            <a:pPr algn="ctr" indent="0" marL="0">
-              <a:lnSpc>
-                <a:spcPct val="130000"/>
-              </a:lnSpc>
-              <a:buNone/>
-            </a:pPr>
-            <a:r>
-              <a:rPr lang="en-US" sz="1400" dirty="0">
-                <a:solidFill>
-                  <a:srgbClr val="374151"/>
-                </a:solidFill>
-                <a:latin typeface="Calibri" pitchFamily="34" charset="0"/>
-                <a:ea typeface="Calibri" pitchFamily="34" charset="-122"/>
-                <a:cs typeface="Calibri" pitchFamily="34" charset="-120"/>
-              </a:rPr>
-              <a:t>重要ポイント抽出が必須</a:t>
-            </a:r>
-            <a:endParaRPr lang="en-US" sz="1400" dirty="0"/>
-          </a:p>
-        </p:txBody>
-      </p:sp>
-      <p:sp>
-        <p:nvSpPr>
-          <p:cNvPr id="18" name="Shape 16"/>
-          <p:cNvSpPr/>
-          <p:nvPr/>
-        </p:nvSpPr>
-        <p:spPr>
-          <a:xfrm>
-            <a:off x="685800" y="3200400"/>
-            <a:ext cx="7772400" cy="365760"/>
-          </a:xfrm>
-          <a:prstGeom prst="rect">
-            <a:avLst>
-              <a:gd name="adj" fmla="val 10000"/>
-            </a:avLst>
-          </a:prstGeom>
-          <a:solidFill>
-            <a:srgbClr val="DBEAFE"/>
-          </a:solidFill>
-          <a:ln/>
-        </p:spPr>
-      </p:sp>
-      <p:sp>
-        <p:nvSpPr>
-          <p:cNvPr id="19" name="Text 17"/>
-          <p:cNvSpPr/>
-          <p:nvPr/>
-        </p:nvSpPr>
-        <p:spPr>
-          <a:xfrm>
-            <a:off x="822960" y="3200400"/>
-            <a:ext cx="7498080" cy="365760"/>
-          </a:xfrm>
-          <a:prstGeom prst="rect">
-            <a:avLst/>
-          </a:prstGeom>
-          <a:noFill/>
-          <a:ln/>
-        </p:spPr>
-        <p:txBody>
-          <a:bodyPr wrap="square" rtlCol="0" anchor="ctr">
-            <a:normAutofit/>
-          </a:bodyPr>
-          <a:lstStyle/>
-          <a:p>
-            <a:pPr indent="0" marL="0">
-              <a:buNone/>
-            </a:pPr>
-            <a:r>
-              <a:rPr lang="en-US" sz="1200" i="1" dirty="0">
-                <a:solidFill>
-                  <a:srgbClr val="6B7280"/>
-                </a:solidFill>
-                <a:latin typeface="Calibri" pitchFamily="34" charset="0"/>
-                <a:ea typeface="Calibri" pitchFamily="34" charset="-122"/>
-                <a:cs typeface="Calibri" pitchFamily="34" charset="-120"/>
-              </a:rPr>
-              <a:t>Google Workspace に統合された Gemini がこれらの課題を解決する</a:t>
-            </a:r>
-            <a:endParaRPr lang="en-US" sz="1200" dirty="0"/>
           </a:p>
         </p:txBody>
       </p:sp>
@@ -4425,7 +4451,7 @@
         <p:spPr>
           <a:xfrm>
             <a:off x="685800" y="137160"/>
-            <a:ext cx="914400" cy="256032"/>
+            <a:ext cx="1353312" cy="256032"/>
           </a:xfrm>
           <a:prstGeom prst="rect">
             <a:avLst>
@@ -4447,7 +4473,7 @@
         <p:spPr>
           <a:xfrm>
             <a:off x="685800" y="137160"/>
-            <a:ext cx="914400" cy="256032"/>
+            <a:ext cx="1353312" cy="256032"/>
           </a:xfrm>
           <a:prstGeom prst="rect">
             <a:avLst/>
@@ -4473,7 +4499,7 @@
                 <a:ea typeface="Calibri" pitchFamily="34" charset="-122"/>
                 <a:cs typeface="Calibri" pitchFamily="34" charset="-120"/>
               </a:rPr>
-              <a:t>GMAIL</a:t>
+              <a:t>DEMO PREP</a:t>
             </a:r>
             <a:endParaRPr lang="en-US" sz="1000" dirty="0"/>
           </a:p>
@@ -4514,7 +4540,7 @@
                 <a:ea typeface="Calibri" pitchFamily="34" charset="-122"/>
                 <a:cs typeface="Calibri" pitchFamily="34" charset="-120"/>
               </a:rPr>
-              <a:t>Gmail 統合① メール自動生成</a:t>
+              <a:t>実演のシナリオ</a:t>
             </a:r>
             <a:endParaRPr lang="en-US" sz="2400" dirty="0"/>
           </a:p>
@@ -4634,11 +4660,11 @@
         <p:spPr>
           <a:xfrm>
             <a:off x="685800" y="822960"/>
-            <a:ext cx="7772400" cy="1097280"/>
+            <a:ext cx="7772400" cy="731520"/>
           </a:xfrm>
           <a:prstGeom prst="rect">
             <a:avLst>
-              <a:gd name="adj" fmla="val 4167"/>
+              <a:gd name="adj" fmla="val 6250"/>
             </a:avLst>
           </a:prstGeom>
           <a:solidFill>
@@ -4655,8 +4681,8 @@
         </p:nvSpPr>
         <p:spPr>
           <a:xfrm>
-            <a:off x="960120" y="914400"/>
-            <a:ext cx="6400800" cy="320040"/>
+            <a:off x="960120" y="868680"/>
+            <a:ext cx="7680960" cy="640080"/>
           </a:xfrm>
           <a:prstGeom prst="rect">
             <a:avLst/>
@@ -4674,15 +4700,83 @@
               <a:buNone/>
             </a:pPr>
             <a:r>
+              <a:rPr lang="en-US" sz="1600" dirty="0">
+                <a:solidFill>
+                  <a:srgbClr val="111827"/>
+                </a:solidFill>
+                <a:latin typeface="Calibri" pitchFamily="34" charset="0"/>
+                <a:ea typeface="Calibri" pitchFamily="34" charset="-122"/>
+                <a:cs typeface="Calibri" pitchFamily="34" charset="-120"/>
+              </a:rPr>
+              <a:t>これから、営業メールへの返信を Gemini で作成する様子をお見せします。</a:t>
+            </a:r>
+            <a:endParaRPr lang="en-US" sz="1600" dirty="0"/>
+          </a:p>
+        </p:txBody>
+      </p:sp>
+      <p:sp>
+        <p:nvSpPr>
+          <p:cNvPr id="11" name="Shape 9"/>
+          <p:cNvSpPr/>
+          <p:nvPr/>
+        </p:nvSpPr>
+        <p:spPr>
+          <a:xfrm>
+            <a:off x="868680" y="1828800"/>
+            <a:ext cx="2286000" cy="1645920"/>
+          </a:xfrm>
+          <a:prstGeom prst="rect">
+            <a:avLst>
+              <a:gd name="adj" fmla="val 2778"/>
+            </a:avLst>
+          </a:prstGeom>
+          <a:solidFill>
+            <a:srgbClr val="DBEAFE"/>
+          </a:solidFill>
+          <a:ln w="12700">
+            <a:solidFill>
+              <a:srgbClr val="2563EB"/>
+            </a:solidFill>
+            <a:prstDash val="solid"/>
+          </a:ln>
+        </p:spPr>
+      </p:sp>
+      <p:sp>
+        <p:nvSpPr>
+          <p:cNvPr id="12" name="Text 10"/>
+          <p:cNvSpPr/>
+          <p:nvPr/>
+        </p:nvSpPr>
+        <p:spPr>
+          <a:xfrm>
+            <a:off x="868680" y="2057400"/>
+            <a:ext cx="2286000" cy="320040"/>
+          </a:xfrm>
+          <a:prstGeom prst="rect">
+            <a:avLst/>
+          </a:prstGeom>
+          <a:noFill/>
+          <a:ln/>
+        </p:spPr>
+        <p:txBody>
+          <a:bodyPr wrap="square" rtlCol="0" anchor="ctr">
+            <a:normAutofit/>
+          </a:bodyPr>
+          <a:lstStyle/>
+          <a:p>
+            <a:pPr algn="ctr" indent="0" marL="0">
+              <a:buNone/>
+            </a:pPr>
+            <a:r>
               <a:rPr lang="en-US" sz="1600" b="1" dirty="0">
                 <a:solidFill>
-                  <a:srgbClr val="111827"/>
-                </a:solidFill>
-                <a:latin typeface="Calibri" pitchFamily="34" charset="0"/>
-                <a:ea typeface="Calibri" pitchFamily="34" charset="-122"/>
-                <a:cs typeface="Calibri" pitchFamily="34" charset="-120"/>
-              </a:rPr>
-              <a:t>「プロジェクト進捗について」と書き始めると……</a:t>
+                  <a:srgbClr val="2563EB"/>
+                </a:solidFill>
+                <a:latin typeface="Calibri" pitchFamily="34" charset="0"/>
+                <a:ea typeface="Calibri" pitchFamily="34" charset="-122"/>
+                <a:cs typeface="Calibri" pitchFamily="34" charset="-120"/>
+              </a:rPr>
+              <a:t>受信メール</a:t>
             </a:r>
             <a:endParaRPr lang="en-US" sz="1600" dirty="0"/>
           </a:p>
@@ -4690,28 +4784,28 @@
       </p:sp>
       <p:sp>
         <p:nvSpPr>
-          <p:cNvPr id="11" name="Text 9"/>
-          <p:cNvSpPr/>
-          <p:nvPr/>
-        </p:nvSpPr>
-        <p:spPr>
-          <a:xfrm>
-            <a:off x="960120" y="1280160"/>
-            <a:ext cx="6400800" cy="548640"/>
-          </a:xfrm>
-          <a:prstGeom prst="rect">
-            <a:avLst/>
-          </a:prstGeom>
-          <a:noFill/>
-          <a:ln/>
-        </p:spPr>
-        <p:txBody>
-          <a:bodyPr wrap="square" rtlCol="0" anchor="ctr">
-            <a:normAutofit/>
-          </a:bodyPr>
-          <a:lstStyle/>
-          <a:p>
-            <a:pPr indent="0" marL="0">
+          <p:cNvPr id="13" name="Text 11"/>
+          <p:cNvSpPr/>
+          <p:nvPr/>
+        </p:nvSpPr>
+        <p:spPr>
+          <a:xfrm>
+            <a:off x="1005840" y="2423160"/>
+            <a:ext cx="2011680" cy="868680"/>
+          </a:xfrm>
+          <a:prstGeom prst="rect">
+            <a:avLst/>
+          </a:prstGeom>
+          <a:noFill/>
+          <a:ln/>
+        </p:spPr>
+        <p:txBody>
+          <a:bodyPr wrap="square" rtlCol="0" anchor="ctr">
+            <a:normAutofit/>
+          </a:bodyPr>
+          <a:lstStyle/>
+          <a:p>
+            <a:pPr algn="ctr" indent="0" marL="0">
               <a:lnSpc>
                 <a:spcPct val="130000"/>
               </a:lnSpc>
@@ -4726,12 +4820,12 @@
                 <a:ea typeface="Calibri" pitchFamily="34" charset="-122"/>
                 <a:cs typeface="Calibri" pitchFamily="34" charset="-120"/>
               </a:rPr>
-              <a:t>プロジェクト内容、進捗状況、次のアクション、署名まで</a:t>
+              <a:t>顧客からの</a:t>
             </a:r>
             <a:endParaRPr lang="en-US" sz="1400" dirty="0"/>
           </a:p>
           <a:p>
-            <a:pPr indent="0" marL="0">
+            <a:pPr algn="ctr" indent="0" marL="0">
               <a:lnSpc>
                 <a:spcPct val="130000"/>
               </a:lnSpc>
@@ -4746,7 +4840,7 @@
                 <a:ea typeface="Calibri" pitchFamily="34" charset="-122"/>
                 <a:cs typeface="Calibri" pitchFamily="34" charset="-120"/>
               </a:rPr>
-              <a:t>自動で補完されます。もちろん修正可能です。</a:t>
+              <a:t>提案依頼</a:t>
             </a:r>
             <a:endParaRPr lang="en-US" sz="1400" dirty="0"/>
           </a:p>
@@ -4754,18 +4848,18 @@
       </p:sp>
       <p:sp>
         <p:nvSpPr>
-          <p:cNvPr id="12" name="Shape 10"/>
-          <p:cNvSpPr/>
-          <p:nvPr/>
-        </p:nvSpPr>
-        <p:spPr>
-          <a:xfrm>
-            <a:off x="868680" y="2286000"/>
-            <a:ext cx="2286000" cy="1463040"/>
+          <p:cNvPr id="14" name="Shape 12"/>
+          <p:cNvSpPr/>
+          <p:nvPr/>
+        </p:nvSpPr>
+        <p:spPr>
+          <a:xfrm>
+            <a:off x="3429000" y="1828800"/>
+            <a:ext cx="2286000" cy="1645920"/>
           </a:xfrm>
           <a:prstGeom prst="rect">
             <a:avLst>
-              <a:gd name="adj" fmla="val 3125"/>
+              <a:gd name="adj" fmla="val 2778"/>
             </a:avLst>
           </a:prstGeom>
           <a:solidFill>
@@ -4781,13 +4875,13 @@
       </p:sp>
       <p:sp>
         <p:nvSpPr>
-          <p:cNvPr id="13" name="Text 11"/>
-          <p:cNvSpPr/>
-          <p:nvPr/>
-        </p:nvSpPr>
-        <p:spPr>
-          <a:xfrm>
-            <a:off x="868680" y="2514600"/>
+          <p:cNvPr id="15" name="Text 13"/>
+          <p:cNvSpPr/>
+          <p:nvPr/>
+        </p:nvSpPr>
+        <p:spPr>
+          <a:xfrm>
+            <a:off x="3429000" y="2057400"/>
             <a:ext cx="2286000" cy="320040"/>
           </a:xfrm>
           <a:prstGeom prst="rect">
@@ -4814,39 +4908,22 @@
                 <a:ea typeface="Calibri" pitchFamily="34" charset="-122"/>
                 <a:cs typeface="Calibri" pitchFamily="34" charset="-120"/>
               </a:rPr>
-              <a:t>時間削減</a:t>
+              <a:t>Gemini処理</a:t>
             </a:r>
             <a:endParaRPr lang="en-US" sz="1600" dirty="0"/>
           </a:p>
-          <a:p>
-            <a:pPr algn="ctr" indent="0" marL="0">
-              <a:buNone/>
-            </a:pPr>
-            <a:r>
-              <a:rPr lang="en-US" sz="1600" b="1" dirty="0">
-                <a:solidFill>
-                  <a:srgbClr val="059669"/>
-                </a:solidFill>
-                <a:latin typeface="Calibri" pitchFamily="34" charset="0"/>
-                <a:ea typeface="Calibri" pitchFamily="34" charset="-122"/>
-                <a:cs typeface="Calibri" pitchFamily="34" charset="-120"/>
-              </a:rPr>
-              <a:t>50～70%</a:t>
-            </a:r>
-            <a:endParaRPr lang="en-US" sz="1600" dirty="0"/>
-          </a:p>
-        </p:txBody>
-      </p:sp>
-      <p:sp>
-        <p:nvSpPr>
-          <p:cNvPr id="14" name="Text 12"/>
-          <p:cNvSpPr/>
-          <p:nvPr/>
-        </p:nvSpPr>
-        <p:spPr>
-          <a:xfrm>
-            <a:off x="1005840" y="2880360"/>
-            <a:ext cx="2011680" cy="685800"/>
+        </p:txBody>
+      </p:sp>
+      <p:sp>
+        <p:nvSpPr>
+          <p:cNvPr id="16" name="Text 14"/>
+          <p:cNvSpPr/>
+          <p:nvPr/>
+        </p:nvSpPr>
+        <p:spPr>
+          <a:xfrm>
+            <a:off x="3566160" y="2423160"/>
+            <a:ext cx="2011680" cy="868680"/>
           </a:xfrm>
           <a:prstGeom prst="rect">
             <a:avLst/>
@@ -4875,7 +4952,7 @@
                 <a:ea typeface="Calibri" pitchFamily="34" charset="-122"/>
                 <a:cs typeface="Calibri" pitchFamily="34" charset="-120"/>
               </a:rPr>
-              <a:t>企業導入事例</a:t>
+              <a:t>背景情報から</a:t>
             </a:r>
             <a:endParaRPr lang="en-US" sz="1400" dirty="0"/>
           </a:p>
@@ -4895,7 +4972,7 @@
                 <a:ea typeface="Calibri" pitchFamily="34" charset="-122"/>
                 <a:cs typeface="Calibri" pitchFamily="34" charset="-120"/>
               </a:rPr>
-              <a:t>メール作成が高速化</a:t>
+              <a:t>回答を生成</a:t>
             </a:r>
             <a:endParaRPr lang="en-US" sz="1400" dirty="0"/>
           </a:p>
@@ -4903,26 +4980,26 @@
       </p:sp>
       <p:sp>
         <p:nvSpPr>
-          <p:cNvPr id="15" name="Shape 13"/>
-          <p:cNvSpPr/>
-          <p:nvPr/>
-        </p:nvSpPr>
-        <p:spPr>
-          <a:xfrm>
-            <a:off x="3429000" y="2286000"/>
-            <a:ext cx="2286000" cy="1463040"/>
+          <p:cNvPr id="17" name="Shape 15"/>
+          <p:cNvSpPr/>
+          <p:nvPr/>
+        </p:nvSpPr>
+        <p:spPr>
+          <a:xfrm>
+            <a:off x="5989320" y="1828800"/>
+            <a:ext cx="2286000" cy="1645920"/>
           </a:xfrm>
           <a:prstGeom prst="rect">
             <a:avLst>
-              <a:gd name="adj" fmla="val 3125"/>
+              <a:gd name="adj" fmla="val 2778"/>
             </a:avLst>
           </a:prstGeom>
           <a:solidFill>
-            <a:srgbClr val="D1FAE5"/>
+            <a:srgbClr val="FEF3C7"/>
           </a:solidFill>
           <a:ln w="12700">
             <a:solidFill>
-              <a:srgbClr val="059669"/>
+              <a:srgbClr val="D97706"/>
             </a:solidFill>
             <a:prstDash val="solid"/>
           </a:ln>
@@ -4930,13 +5007,13 @@
       </p:sp>
       <p:sp>
         <p:nvSpPr>
-          <p:cNvPr id="16" name="Text 14"/>
-          <p:cNvSpPr/>
-          <p:nvPr/>
-        </p:nvSpPr>
-        <p:spPr>
-          <a:xfrm>
-            <a:off x="3429000" y="2514600"/>
+          <p:cNvPr id="18" name="Text 16"/>
+          <p:cNvSpPr/>
+          <p:nvPr/>
+        </p:nvSpPr>
+        <p:spPr>
+          <a:xfrm>
+            <a:off x="5989320" y="2057400"/>
             <a:ext cx="2286000" cy="320040"/>
           </a:xfrm>
           <a:prstGeom prst="rect">
@@ -4957,13 +5034,13 @@
             <a:r>
               <a:rPr lang="en-US" sz="1600" b="1" dirty="0">
                 <a:solidFill>
-                  <a:srgbClr val="059669"/>
-                </a:solidFill>
-                <a:latin typeface="Calibri" pitchFamily="34" charset="0"/>
-                <a:ea typeface="Calibri" pitchFamily="34" charset="-122"/>
-                <a:cs typeface="Calibri" pitchFamily="34" charset="-120"/>
-              </a:rPr>
-              <a:t>ドラフト品質</a:t>
+                  <a:srgbClr val="D97706"/>
+                </a:solidFill>
+                <a:latin typeface="Calibri" pitchFamily="34" charset="0"/>
+                <a:ea typeface="Calibri" pitchFamily="34" charset="-122"/>
+                <a:cs typeface="Calibri" pitchFamily="34" charset="-120"/>
+              </a:rPr>
+              <a:t>カスタマイズ</a:t>
             </a:r>
             <a:endParaRPr lang="en-US" sz="1600" dirty="0"/>
           </a:p>
@@ -4971,14 +5048,14 @@
       </p:sp>
       <p:sp>
         <p:nvSpPr>
-          <p:cNvPr id="17" name="Text 15"/>
-          <p:cNvSpPr/>
-          <p:nvPr/>
-        </p:nvSpPr>
-        <p:spPr>
-          <a:xfrm>
-            <a:off x="3566160" y="2880360"/>
-            <a:ext cx="2011680" cy="685800"/>
+          <p:cNvPr id="19" name="Text 17"/>
+          <p:cNvSpPr/>
+          <p:nvPr/>
+        </p:nvSpPr>
+        <p:spPr>
+          <a:xfrm>
+            <a:off x="6126480" y="2423160"/>
+            <a:ext cx="2011680" cy="868680"/>
           </a:xfrm>
           <a:prstGeom prst="rect">
             <a:avLst/>
@@ -5007,7 +5084,7 @@
                 <a:ea typeface="Calibri" pitchFamily="34" charset="-122"/>
                 <a:cs typeface="Calibri" pitchFamily="34" charset="-120"/>
               </a:rPr>
-              <a:t>文脈を理解した</a:t>
+              <a:t>生成案を</a:t>
             </a:r>
             <a:endParaRPr lang="en-US" sz="1400" dirty="0"/>
           </a:p>
@@ -5027,139 +5104,7 @@
                 <a:ea typeface="Calibri" pitchFamily="34" charset="-122"/>
                 <a:cs typeface="Calibri" pitchFamily="34" charset="-120"/>
               </a:rPr>
-              <a:t>完全な文章生成</a:t>
-            </a:r>
-            <a:endParaRPr lang="en-US" sz="1400" dirty="0"/>
-          </a:p>
-        </p:txBody>
-      </p:sp>
-      <p:sp>
-        <p:nvSpPr>
-          <p:cNvPr id="18" name="Shape 16"/>
-          <p:cNvSpPr/>
-          <p:nvPr/>
-        </p:nvSpPr>
-        <p:spPr>
-          <a:xfrm>
-            <a:off x="5989320" y="2286000"/>
-            <a:ext cx="2286000" cy="1463040"/>
-          </a:xfrm>
-          <a:prstGeom prst="rect">
-            <a:avLst>
-              <a:gd name="adj" fmla="val 3125"/>
-            </a:avLst>
-          </a:prstGeom>
-          <a:solidFill>
-            <a:srgbClr val="D1FAE5"/>
-          </a:solidFill>
-          <a:ln w="12700">
-            <a:solidFill>
-              <a:srgbClr val="059669"/>
-            </a:solidFill>
-            <a:prstDash val="solid"/>
-          </a:ln>
-        </p:spPr>
-      </p:sp>
-      <p:sp>
-        <p:nvSpPr>
-          <p:cNvPr id="19" name="Text 17"/>
-          <p:cNvSpPr/>
-          <p:nvPr/>
-        </p:nvSpPr>
-        <p:spPr>
-          <a:xfrm>
-            <a:off x="5989320" y="2514600"/>
-            <a:ext cx="2286000" cy="320040"/>
-          </a:xfrm>
-          <a:prstGeom prst="rect">
-            <a:avLst/>
-          </a:prstGeom>
-          <a:noFill/>
-          <a:ln/>
-        </p:spPr>
-        <p:txBody>
-          <a:bodyPr wrap="square" rtlCol="0" anchor="ctr">
-            <a:normAutofit/>
-          </a:bodyPr>
-          <a:lstStyle/>
-          <a:p>
-            <a:pPr algn="ctr" indent="0" marL="0">
-              <a:buNone/>
-            </a:pPr>
-            <a:r>
-              <a:rPr lang="en-US" sz="1600" b="1" dirty="0">
-                <a:solidFill>
-                  <a:srgbClr val="059669"/>
-                </a:solidFill>
-                <a:latin typeface="Calibri" pitchFamily="34" charset="0"/>
-                <a:ea typeface="Calibri" pitchFamily="34" charset="-122"/>
-                <a:cs typeface="Calibri" pitchFamily="34" charset="-120"/>
-              </a:rPr>
-              <a:t>完全カスタマイズ</a:t>
-            </a:r>
-            <a:endParaRPr lang="en-US" sz="1600" dirty="0"/>
-          </a:p>
-        </p:txBody>
-      </p:sp>
-      <p:sp>
-        <p:nvSpPr>
-          <p:cNvPr id="20" name="Text 18"/>
-          <p:cNvSpPr/>
-          <p:nvPr/>
-        </p:nvSpPr>
-        <p:spPr>
-          <a:xfrm>
-            <a:off x="6126480" y="2880360"/>
-            <a:ext cx="2011680" cy="685800"/>
-          </a:xfrm>
-          <a:prstGeom prst="rect">
-            <a:avLst/>
-          </a:prstGeom>
-          <a:noFill/>
-          <a:ln/>
-        </p:spPr>
-        <p:txBody>
-          <a:bodyPr wrap="square" rtlCol="0" anchor="ctr">
-            <a:normAutofit/>
-          </a:bodyPr>
-          <a:lstStyle/>
-          <a:p>
-            <a:pPr algn="ctr" indent="0" marL="0">
-              <a:lnSpc>
-                <a:spcPct val="130000"/>
-              </a:lnSpc>
-              <a:buNone/>
-            </a:pPr>
-            <a:r>
-              <a:rPr lang="en-US" sz="1400" dirty="0">
-                <a:solidFill>
-                  <a:srgbClr val="374151"/>
-                </a:solidFill>
-                <a:latin typeface="Calibri" pitchFamily="34" charset="0"/>
-                <a:ea typeface="Calibri" pitchFamily="34" charset="-122"/>
-                <a:cs typeface="Calibri" pitchFamily="34" charset="-120"/>
-              </a:rPr>
-              <a:t>自動生成後も</a:t>
-            </a:r>
-            <a:endParaRPr lang="en-US" sz="1400" dirty="0"/>
-          </a:p>
-          <a:p>
-            <a:pPr algn="ctr" indent="0" marL="0">
-              <a:lnSpc>
-                <a:spcPct val="130000"/>
-              </a:lnSpc>
-              <a:buNone/>
-            </a:pPr>
-            <a:r>
-              <a:rPr lang="en-US" sz="1400" dirty="0">
-                <a:solidFill>
-                  <a:srgbClr val="374151"/>
-                </a:solidFill>
-                <a:latin typeface="Calibri" pitchFamily="34" charset="0"/>
-                <a:ea typeface="Calibri" pitchFamily="34" charset="-122"/>
-                <a:cs typeface="Calibri" pitchFamily="34" charset="-120"/>
-              </a:rPr>
-              <a:t>自由に編集可能</a:t>
+              <a:t>微調整して送信</a:t>
             </a:r>
             <a:endParaRPr lang="en-US" sz="1400" dirty="0"/>
           </a:p>
@@ -5226,7 +5171,7 @@
         <p:spPr>
           <a:xfrm>
             <a:off x="685800" y="137160"/>
-            <a:ext cx="1682496" cy="256032"/>
+            <a:ext cx="1353312" cy="256032"/>
           </a:xfrm>
           <a:prstGeom prst="rect">
             <a:avLst>
@@ -5248,7 +5193,7 @@
         <p:spPr>
           <a:xfrm>
             <a:off x="685800" y="137160"/>
-            <a:ext cx="1682496" cy="256032"/>
+            <a:ext cx="1353312" cy="256032"/>
           </a:xfrm>
           <a:prstGeom prst="rect">
             <a:avLst/>
@@ -5274,7 +5219,7 @@
                 <a:ea typeface="Calibri" pitchFamily="34" charset="-122"/>
                 <a:cs typeface="Calibri" pitchFamily="34" charset="-120"/>
               </a:rPr>
-              <a:t>GMAIL - DEMO</a:t>
+              <a:t>DEMO LIVE</a:t>
             </a:r>
             <a:endParaRPr lang="en-US" sz="1000" dirty="0"/>
           </a:p>
@@ -5315,7 +5260,7 @@
                 <a:ea typeface="Calibri" pitchFamily="34" charset="-122"/>
                 <a:cs typeface="Calibri" pitchFamily="34" charset="-120"/>
               </a:rPr>
-              <a:t>Gmail 統合② メール自動分類と優先度付け</a:t>
+              <a:t>実演: Gmail メール作成 + Drive 活用</a:t>
             </a:r>
             <a:endParaRPr lang="en-US" sz="2400" dirty="0"/>
           </a:p>
@@ -5434,16 +5379,16 @@
         </p:nvSpPr>
         <p:spPr>
           <a:xfrm>
-            <a:off x="685800" y="822960"/>
-            <a:ext cx="7772400" cy="457200"/>
+            <a:off x="685800" y="868680"/>
+            <a:ext cx="7772400" cy="1645920"/>
           </a:xfrm>
           <a:prstGeom prst="rect">
             <a:avLst>
-              <a:gd name="adj" fmla="val 10000"/>
+              <a:gd name="adj" fmla="val 2778"/>
             </a:avLst>
           </a:prstGeom>
           <a:solidFill>
-            <a:srgbClr val="DBEAFE"/>
+            <a:srgbClr val="F3F4F6"/>
           </a:solidFill>
           <a:ln/>
         </p:spPr>
@@ -5456,8 +5401,8 @@
         </p:nvSpPr>
         <p:spPr>
           <a:xfrm>
-            <a:off x="960120" y="822960"/>
-            <a:ext cx="7223760" cy="457200"/>
+            <a:off x="960120" y="914400"/>
+            <a:ext cx="7680960" cy="1554480"/>
           </a:xfrm>
           <a:prstGeom prst="rect">
             <a:avLst/>
@@ -5472,115 +5417,38 @@
           <a:lstStyle/>
           <a:p>
             <a:pPr indent="0" marL="0">
-              <a:buNone/>
-            </a:pPr>
-            <a:r>
-              <a:rPr lang="en-US" sz="1600" i="1" dirty="0">
-                <a:solidFill>
-                  <a:srgbClr val="2563EB"/>
-                </a:solidFill>
-                <a:latin typeface="Calibri" pitchFamily="34" charset="0"/>
-                <a:ea typeface="Calibri" pitchFamily="34" charset="-122"/>
-                <a:cs typeface="Calibri" pitchFamily="34" charset="-120"/>
-              </a:rPr>
-              <a:t>👁️ 次のスライドで実演: メール受信トレイの自動分類を見てみましょう</a:t>
-            </a:r>
-            <a:endParaRPr lang="en-US" sz="1600" dirty="0"/>
-          </a:p>
-        </p:txBody>
-      </p:sp>
-      <p:sp>
-        <p:nvSpPr>
-          <p:cNvPr id="11" name="Shape 9"/>
-          <p:cNvSpPr/>
-          <p:nvPr/>
-        </p:nvSpPr>
-        <p:spPr>
-          <a:xfrm>
-            <a:off x="685800" y="1554480"/>
-            <a:ext cx="7772400" cy="777240"/>
-          </a:xfrm>
-          <a:prstGeom prst="rect">
-            <a:avLst>
-              <a:gd name="adj" fmla="val 5882"/>
-            </a:avLst>
-          </a:prstGeom>
-          <a:solidFill>
-            <a:srgbClr val="FAFBFC"/>
-          </a:solidFill>
-          <a:ln w="6350">
-            <a:solidFill>
-              <a:srgbClr val="E5E7EB"/>
-            </a:solidFill>
-            <a:prstDash val="solid"/>
-          </a:ln>
-        </p:spPr>
-      </p:sp>
-      <p:sp>
-        <p:nvSpPr>
-          <p:cNvPr id="12" name="Text 10"/>
-          <p:cNvSpPr/>
-          <p:nvPr/>
-        </p:nvSpPr>
-        <p:spPr>
-          <a:xfrm>
-            <a:off x="960120" y="1600200"/>
-            <a:ext cx="2286000" cy="274320"/>
-          </a:xfrm>
-          <a:prstGeom prst="rect">
-            <a:avLst/>
-          </a:prstGeom>
-          <a:noFill/>
-          <a:ln/>
-        </p:spPr>
-        <p:txBody>
-          <a:bodyPr wrap="square" rtlCol="0" anchor="ctr">
-            <a:normAutofit/>
-          </a:bodyPr>
-          <a:lstStyle/>
+              <a:lnSpc>
+                <a:spcPct val="130000"/>
+              </a:lnSpc>
+              <a:buNone/>
+            </a:pPr>
+            <a:r>
+              <a:rPr lang="en-US" sz="1400" dirty="0">
+                <a:solidFill>
+                  <a:srgbClr val="374151"/>
+                </a:solidFill>
+                <a:latin typeface="Calibri" pitchFamily="34" charset="0"/>
+                <a:ea typeface="Calibri" pitchFamily="34" charset="-122"/>
+                <a:cs typeface="Calibri" pitchFamily="34" charset="-120"/>
+              </a:rPr>
+              <a:t>【実演動画: 57.6秒】</a:t>
+            </a:r>
+            <a:endParaRPr lang="en-US" sz="1400" dirty="0"/>
+          </a:p>
           <a:p>
             <a:pPr indent="0" marL="0">
-              <a:buNone/>
-            </a:pPr>
-            <a:r>
-              <a:rPr lang="en-US" sz="1600" b="1" dirty="0">
-                <a:solidFill>
-                  <a:srgbClr val="111827"/>
-                </a:solidFill>
-                <a:latin typeface="Calibri" pitchFamily="34" charset="0"/>
-                <a:ea typeface="Calibri" pitchFamily="34" charset="-122"/>
-                <a:cs typeface="Calibri" pitchFamily="34" charset="-120"/>
-              </a:rPr>
-              <a:t>高優先度</a:t>
-            </a:r>
-            <a:endParaRPr lang="en-US" sz="1600" dirty="0"/>
-          </a:p>
-        </p:txBody>
-      </p:sp>
-      <p:sp>
-        <p:nvSpPr>
-          <p:cNvPr id="13" name="Text 11"/>
-          <p:cNvSpPr/>
-          <p:nvPr/>
-        </p:nvSpPr>
-        <p:spPr>
-          <a:xfrm>
-            <a:off x="960120" y="1874520"/>
-            <a:ext cx="6858000" cy="320040"/>
-          </a:xfrm>
-          <a:prstGeom prst="rect">
-            <a:avLst/>
-          </a:prstGeom>
-          <a:noFill/>
-          <a:ln/>
-        </p:spPr>
-        <p:txBody>
-          <a:bodyPr wrap="square" rtlCol="0" anchor="ctr">
-            <a:normAutofit/>
-          </a:bodyPr>
-          <a:lstStyle/>
+              <a:lnSpc>
+                <a:spcPct val="130000"/>
+              </a:lnSpc>
+              <a:buNone/>
+            </a:pPr>
+            <a:endParaRPr lang="en-US" sz="1400" dirty="0"/>
+          </a:p>
           <a:p>
             <a:pPr indent="0" marL="0">
+              <a:lnSpc>
+                <a:spcPct val="130000"/>
+              </a:lnSpc>
               <a:buNone/>
             </a:pPr>
             <a:r>
@@ -5592,104 +5460,35 @@
                 <a:ea typeface="Calibri" pitchFamily="34" charset="-122"/>
                 <a:cs typeface="Calibri" pitchFamily="34" charset="-120"/>
               </a:rPr>
-              <a:t>重要なクライアント連絡・緊急対応メール</a:t>
+              <a:t>1. Gmail で顧客メールを受け取る</a:t>
             </a:r>
             <a:endParaRPr lang="en-US" sz="1400" dirty="0"/>
           </a:p>
-        </p:txBody>
-      </p:sp>
-      <p:sp>
-        <p:nvSpPr>
-          <p:cNvPr id="14" name="Shape 12"/>
-          <p:cNvSpPr/>
-          <p:nvPr/>
-        </p:nvSpPr>
-        <p:spPr>
-          <a:xfrm>
-            <a:off x="685800" y="2468880"/>
-            <a:ext cx="7772400" cy="777240"/>
-          </a:xfrm>
-          <a:prstGeom prst="rect">
-            <a:avLst>
-              <a:gd name="adj" fmla="val 5882"/>
-            </a:avLst>
-          </a:prstGeom>
-          <a:solidFill>
-            <a:srgbClr val="FAFBFC"/>
-          </a:solidFill>
-          <a:ln w="6350">
-            <a:solidFill>
-              <a:srgbClr val="E5E7EB"/>
-            </a:solidFill>
-            <a:prstDash val="solid"/>
-          </a:ln>
-        </p:spPr>
-      </p:sp>
-      <p:sp>
-        <p:nvSpPr>
-          <p:cNvPr id="15" name="Text 13"/>
-          <p:cNvSpPr/>
-          <p:nvPr/>
-        </p:nvSpPr>
-        <p:spPr>
-          <a:xfrm>
-            <a:off x="960120" y="2514600"/>
-            <a:ext cx="2286000" cy="274320"/>
-          </a:xfrm>
-          <a:prstGeom prst="rect">
-            <a:avLst/>
-          </a:prstGeom>
-          <a:noFill/>
-          <a:ln/>
-        </p:spPr>
-        <p:txBody>
-          <a:bodyPr wrap="square" rtlCol="0" anchor="ctr">
-            <a:normAutofit/>
-          </a:bodyPr>
-          <a:lstStyle/>
           <a:p>
             <a:pPr indent="0" marL="0">
-              <a:buNone/>
-            </a:pPr>
-            <a:r>
-              <a:rPr lang="en-US" sz="1600" b="1" dirty="0">
-                <a:solidFill>
-                  <a:srgbClr val="111827"/>
-                </a:solidFill>
-                <a:latin typeface="Calibri" pitchFamily="34" charset="0"/>
-                <a:ea typeface="Calibri" pitchFamily="34" charset="-122"/>
-                <a:cs typeface="Calibri" pitchFamily="34" charset="-120"/>
-              </a:rPr>
-              <a:t>中優先度</a:t>
-            </a:r>
-            <a:endParaRPr lang="en-US" sz="1600" dirty="0"/>
-          </a:p>
-        </p:txBody>
-      </p:sp>
-      <p:sp>
-        <p:nvSpPr>
-          <p:cNvPr id="16" name="Text 14"/>
-          <p:cNvSpPr/>
-          <p:nvPr/>
-        </p:nvSpPr>
-        <p:spPr>
-          <a:xfrm>
-            <a:off x="960120" y="2788920"/>
-            <a:ext cx="6858000" cy="320040"/>
-          </a:xfrm>
-          <a:prstGeom prst="rect">
-            <a:avLst/>
-          </a:prstGeom>
-          <a:noFill/>
-          <a:ln/>
-        </p:spPr>
-        <p:txBody>
-          <a:bodyPr wrap="square" rtlCol="0" anchor="ctr">
-            <a:normAutofit/>
-          </a:bodyPr>
-          <a:lstStyle/>
+              <a:lnSpc>
+                <a:spcPct val="130000"/>
+              </a:lnSpc>
+              <a:buNone/>
+            </a:pPr>
+            <a:r>
+              <a:rPr lang="en-US" sz="1400" dirty="0">
+                <a:solidFill>
+                  <a:srgbClr val="374151"/>
+                </a:solidFill>
+                <a:latin typeface="Calibri" pitchFamily="34" charset="0"/>
+                <a:ea typeface="Calibri" pitchFamily="34" charset="-122"/>
+                <a:cs typeface="Calibri" pitchFamily="34" charset="-120"/>
+              </a:rPr>
+              <a:t>2. 「Gemini で返信案を作成」をクリック</a:t>
+            </a:r>
+            <a:endParaRPr lang="en-US" sz="1400" dirty="0"/>
+          </a:p>
           <a:p>
             <a:pPr indent="0" marL="0">
+              <a:lnSpc>
+                <a:spcPct val="130000"/>
+              </a:lnSpc>
               <a:buNone/>
             </a:pPr>
             <a:r>
@@ -5701,104 +5500,15 @@
                 <a:ea typeface="Calibri" pitchFamily="34" charset="-122"/>
                 <a:cs typeface="Calibri" pitchFamily="34" charset="-120"/>
               </a:rPr>
-              <a:t>社内通知・アクション必要な定期報告</a:t>
+              <a:t>3. Drive から既存提案書を参照させ、カスタマイズ</a:t>
             </a:r>
             <a:endParaRPr lang="en-US" sz="1400" dirty="0"/>
           </a:p>
-        </p:txBody>
-      </p:sp>
-      <p:sp>
-        <p:nvSpPr>
-          <p:cNvPr id="17" name="Shape 15"/>
-          <p:cNvSpPr/>
-          <p:nvPr/>
-        </p:nvSpPr>
-        <p:spPr>
-          <a:xfrm>
-            <a:off x="685800" y="3383280"/>
-            <a:ext cx="7772400" cy="777240"/>
-          </a:xfrm>
-          <a:prstGeom prst="rect">
-            <a:avLst>
-              <a:gd name="adj" fmla="val 5882"/>
-            </a:avLst>
-          </a:prstGeom>
-          <a:solidFill>
-            <a:srgbClr val="FAFBFC"/>
-          </a:solidFill>
-          <a:ln w="6350">
-            <a:solidFill>
-              <a:srgbClr val="E5E7EB"/>
-            </a:solidFill>
-            <a:prstDash val="solid"/>
-          </a:ln>
-        </p:spPr>
-      </p:sp>
-      <p:sp>
-        <p:nvSpPr>
-          <p:cNvPr id="18" name="Text 16"/>
-          <p:cNvSpPr/>
-          <p:nvPr/>
-        </p:nvSpPr>
-        <p:spPr>
-          <a:xfrm>
-            <a:off x="960120" y="3429000"/>
-            <a:ext cx="2286000" cy="274320"/>
-          </a:xfrm>
-          <a:prstGeom prst="rect">
-            <a:avLst/>
-          </a:prstGeom>
-          <a:noFill/>
-          <a:ln/>
-        </p:spPr>
-        <p:txBody>
-          <a:bodyPr wrap="square" rtlCol="0" anchor="ctr">
-            <a:normAutofit/>
-          </a:bodyPr>
-          <a:lstStyle/>
           <a:p>
             <a:pPr indent="0" marL="0">
-              <a:buNone/>
-            </a:pPr>
-            <a:r>
-              <a:rPr lang="en-US" sz="1600" b="1" dirty="0">
-                <a:solidFill>
-                  <a:srgbClr val="111827"/>
-                </a:solidFill>
-                <a:latin typeface="Calibri" pitchFamily="34" charset="0"/>
-                <a:ea typeface="Calibri" pitchFamily="34" charset="-122"/>
-                <a:cs typeface="Calibri" pitchFamily="34" charset="-120"/>
-              </a:rPr>
-              <a:t>参考情報</a:t>
-            </a:r>
-            <a:endParaRPr lang="en-US" sz="1600" dirty="0"/>
-          </a:p>
-        </p:txBody>
-      </p:sp>
-      <p:sp>
-        <p:nvSpPr>
-          <p:cNvPr id="19" name="Text 17"/>
-          <p:cNvSpPr/>
-          <p:nvPr/>
-        </p:nvSpPr>
-        <p:spPr>
-          <a:xfrm>
-            <a:off x="960120" y="3703320"/>
-            <a:ext cx="6858000" cy="320040"/>
-          </a:xfrm>
-          <a:prstGeom prst="rect">
-            <a:avLst/>
-          </a:prstGeom>
-          <a:noFill/>
-          <a:ln/>
-        </p:spPr>
-        <p:txBody>
-          <a:bodyPr wrap="square" rtlCol="0" anchor="ctr">
-            <a:normAutofit/>
-          </a:bodyPr>
-          <a:lstStyle/>
-          <a:p>
-            <a:pPr indent="0" marL="0">
+              <a:lnSpc>
+                <a:spcPct val="130000"/>
+              </a:lnSpc>
               <a:buNone/>
             </a:pPr>
             <a:r>
@@ -5810,7 +5520,7 @@
                 <a:ea typeface="Calibri" pitchFamily="34" charset="-122"/>
                 <a:cs typeface="Calibri" pitchFamily="34" charset="-120"/>
               </a:rPr>
-              <a:t>業界ニュース・配信メール・参考情報のみ</a:t>
+              <a:t>4. 数秒で完成した返信メールを確認</a:t>
             </a:r>
             <a:endParaRPr lang="en-US" sz="1400" dirty="0"/>
           </a:p>
@@ -5877,7 +5587,7 @@
         <p:spPr>
           <a:xfrm>
             <a:off x="685800" y="137160"/>
-            <a:ext cx="914400" cy="256032"/>
+            <a:ext cx="2121408" cy="256032"/>
           </a:xfrm>
           <a:prstGeom prst="rect">
             <a:avLst>
@@ -5899,7 +5609,7 @@
         <p:spPr>
           <a:xfrm>
             <a:off x="685800" y="137160"/>
-            <a:ext cx="914400" cy="256032"/>
+            <a:ext cx="2121408" cy="256032"/>
           </a:xfrm>
           <a:prstGeom prst="rect">
             <a:avLst/>
@@ -5925,7 +5635,7 @@
                 <a:ea typeface="Calibri" pitchFamily="34" charset="-122"/>
                 <a:cs typeface="Calibri" pitchFamily="34" charset="-120"/>
               </a:rPr>
-              <a:t>DRIVE</a:t>
+              <a:t>DRAFT GENERATION</a:t>
             </a:r>
             <a:endParaRPr lang="en-US" sz="1000" dirty="0"/>
           </a:p>
@@ -5966,7 +5676,7 @@
                 <a:ea typeface="Calibri" pitchFamily="34" charset="-122"/>
                 <a:cs typeface="Calibri" pitchFamily="34" charset="-120"/>
               </a:rPr>
-              <a:t>Google ドライブ統合① ファイル検索と要約</a:t>
+              <a:t>Gmail: 返信ドラフト自動生成の仕組み</a:t>
             </a:r>
             <a:endParaRPr lang="en-US" sz="2400" dirty="0"/>
           </a:p>
@@ -6079,25 +5789,46 @@
       </p:sp>
       <p:sp>
         <p:nvSpPr>
-          <p:cNvPr id="9" name="Shape 7"/>
-          <p:cNvSpPr/>
-          <p:nvPr/>
-        </p:nvSpPr>
-        <p:spPr>
-          <a:xfrm>
-            <a:off x="685800" y="822960"/>
-            <a:ext cx="7772400" cy="685800"/>
-          </a:xfrm>
-          <a:prstGeom prst="rect">
-            <a:avLst>
-              <a:gd name="adj" fmla="val 6667"/>
-            </a:avLst>
+          <p:cNvPr id="9" name="Text 7"/>
+          <p:cNvSpPr/>
+          <p:nvPr/>
+        </p:nvSpPr>
+        <p:spPr>
+          <a:xfrm>
+            <a:off x="685800" y="914400"/>
+            <a:ext cx="457200" cy="457200"/>
+          </a:xfrm>
+          <a:prstGeom prst="ellipse">
+            <a:avLst/>
           </a:prstGeom>
           <a:solidFill>
-            <a:srgbClr val="DBEAFE"/>
+            <a:srgbClr val="2563EB"/>
           </a:solidFill>
           <a:ln/>
         </p:spPr>
+        <p:txBody>
+          <a:bodyPr wrap="square" rtlCol="0" anchor="ctr">
+            <a:normAutofit/>
+          </a:bodyPr>
+          <a:lstStyle/>
+          <a:p>
+            <a:pPr algn="ctr" indent="0" marL="0">
+              <a:buNone/>
+            </a:pPr>
+            <a:r>
+              <a:rPr lang="en-US" sz="2000" b="1" dirty="0">
+                <a:solidFill>
+                  <a:srgbClr val="FFFFFF"/>
+                </a:solidFill>
+                <a:latin typeface="Calibri" pitchFamily="34" charset="0"/>
+                <a:ea typeface="Calibri" pitchFamily="34" charset="-122"/>
+                <a:cs typeface="Calibri" pitchFamily="34" charset="-120"/>
+              </a:rPr>
+              <a:t>1</a:t>
+            </a:r>
+            <a:endParaRPr lang="en-US" sz="2000" dirty="0"/>
+          </a:p>
+        </p:txBody>
       </p:sp>
       <p:sp>
         <p:nvSpPr>
@@ -6107,8 +5838,8 @@
         </p:nvSpPr>
         <p:spPr>
           <a:xfrm>
-            <a:off x="960120" y="868680"/>
-            <a:ext cx="6400800" cy="594360"/>
+            <a:off x="1371600" y="932688"/>
+            <a:ext cx="2286000" cy="320040"/>
           </a:xfrm>
           <a:prstGeom prst="rect">
             <a:avLst/>
@@ -6134,7 +5865,7 @@
                 <a:ea typeface="Calibri" pitchFamily="34" charset="-122"/>
                 <a:cs typeface="Calibri" pitchFamily="34" charset="-120"/>
               </a:rPr>
-              <a:t>「先月のマーケティング予算はいくら？」と聞くだけで……</a:t>
+              <a:t>受信メール読み込み</a:t>
             </a:r>
             <a:endParaRPr lang="en-US" sz="1600" dirty="0"/>
           </a:p>
@@ -6142,40 +5873,97 @@
       </p:sp>
       <p:sp>
         <p:nvSpPr>
-          <p:cNvPr id="11" name="Shape 9"/>
-          <p:cNvSpPr/>
-          <p:nvPr/>
-        </p:nvSpPr>
-        <p:spPr>
-          <a:xfrm>
-            <a:off x="868680" y="1828800"/>
-            <a:ext cx="2286000" cy="1828800"/>
-          </a:xfrm>
-          <a:prstGeom prst="rect">
-            <a:avLst>
-              <a:gd name="adj" fmla="val 2500"/>
-            </a:avLst>
+          <p:cNvPr id="11" name="Text 9"/>
+          <p:cNvSpPr/>
+          <p:nvPr/>
+        </p:nvSpPr>
+        <p:spPr>
+          <a:xfrm>
+            <a:off x="1371600" y="1261872"/>
+            <a:ext cx="2286000" cy="320040"/>
+          </a:xfrm>
+          <a:prstGeom prst="rect">
+            <a:avLst/>
+          </a:prstGeom>
+          <a:noFill/>
+          <a:ln/>
+        </p:spPr>
+        <p:txBody>
+          <a:bodyPr wrap="square" rtlCol="0" anchor="ctr">
+            <a:normAutofit/>
+          </a:bodyPr>
+          <a:lstStyle/>
+          <a:p>
+            <a:pPr indent="0" marL="0">
+              <a:buNone/>
+            </a:pPr>
+            <a:r>
+              <a:rPr lang="en-US" sz="1200" dirty="0">
+                <a:solidFill>
+                  <a:srgbClr val="374151"/>
+                </a:solidFill>
+                <a:latin typeface="Calibri" pitchFamily="34" charset="0"/>
+                <a:ea typeface="Calibri" pitchFamily="34" charset="-122"/>
+                <a:cs typeface="Calibri" pitchFamily="34" charset="-120"/>
+              </a:rPr>
+              <a:t>顧客からのメール内容を AI が理解</a:t>
+            </a:r>
+            <a:endParaRPr lang="en-US" sz="1200" dirty="0"/>
+          </a:p>
+        </p:txBody>
+      </p:sp>
+      <p:sp>
+        <p:nvSpPr>
+          <p:cNvPr id="12" name="Text 10"/>
+          <p:cNvSpPr/>
+          <p:nvPr/>
+        </p:nvSpPr>
+        <p:spPr>
+          <a:xfrm>
+            <a:off x="685800" y="1783080"/>
+            <a:ext cx="457200" cy="457200"/>
+          </a:xfrm>
+          <a:prstGeom prst="ellipse">
+            <a:avLst/>
           </a:prstGeom>
           <a:solidFill>
-            <a:srgbClr val="DBEAFE"/>
+            <a:srgbClr val="2563EB"/>
           </a:solidFill>
-          <a:ln w="12700">
-            <a:solidFill>
-              <a:srgbClr val="2563EB"/>
-            </a:solidFill>
-            <a:prstDash val="solid"/>
-          </a:ln>
-        </p:spPr>
-      </p:sp>
-      <p:sp>
-        <p:nvSpPr>
-          <p:cNvPr id="12" name="Text 10"/>
-          <p:cNvSpPr/>
-          <p:nvPr/>
-        </p:nvSpPr>
-        <p:spPr>
-          <a:xfrm>
-            <a:off x="868680" y="2057400"/>
+          <a:ln/>
+        </p:spPr>
+        <p:txBody>
+          <a:bodyPr wrap="square" rtlCol="0" anchor="ctr">
+            <a:normAutofit/>
+          </a:bodyPr>
+          <a:lstStyle/>
+          <a:p>
+            <a:pPr algn="ctr" indent="0" marL="0">
+              <a:buNone/>
+            </a:pPr>
+            <a:r>
+              <a:rPr lang="en-US" sz="2000" b="1" dirty="0">
+                <a:solidFill>
+                  <a:srgbClr val="FFFFFF"/>
+                </a:solidFill>
+                <a:latin typeface="Calibri" pitchFamily="34" charset="0"/>
+                <a:ea typeface="Calibri" pitchFamily="34" charset="-122"/>
+                <a:cs typeface="Calibri" pitchFamily="34" charset="-120"/>
+              </a:rPr>
+              <a:t>2</a:t>
+            </a:r>
+            <a:endParaRPr lang="en-US" sz="2000" dirty="0"/>
+          </a:p>
+        </p:txBody>
+      </p:sp>
+      <p:sp>
+        <p:nvSpPr>
+          <p:cNvPr id="13" name="Text 11"/>
+          <p:cNvSpPr/>
+          <p:nvPr/>
+        </p:nvSpPr>
+        <p:spPr>
+          <a:xfrm>
+            <a:off x="1371600" y="1801368"/>
             <a:ext cx="2286000" cy="320040"/>
           </a:xfrm>
           <a:prstGeom prst="rect">
@@ -6190,19 +5978,144 @@
           </a:bodyPr>
           <a:lstStyle/>
           <a:p>
+            <a:pPr indent="0" marL="0">
+              <a:buNone/>
+            </a:pPr>
+            <a:r>
+              <a:rPr lang="en-US" sz="1600" b="1" dirty="0">
+                <a:solidFill>
+                  <a:srgbClr val="111827"/>
+                </a:solidFill>
+                <a:latin typeface="Calibri" pitchFamily="34" charset="0"/>
+                <a:ea typeface="Calibri" pitchFamily="34" charset="-122"/>
+                <a:cs typeface="Calibri" pitchFamily="34" charset="-120"/>
+              </a:rPr>
+              <a:t>背景情報の検索</a:t>
+            </a:r>
+            <a:endParaRPr lang="en-US" sz="1600" dirty="0"/>
+          </a:p>
+        </p:txBody>
+      </p:sp>
+      <p:sp>
+        <p:nvSpPr>
+          <p:cNvPr id="14" name="Text 12"/>
+          <p:cNvSpPr/>
+          <p:nvPr/>
+        </p:nvSpPr>
+        <p:spPr>
+          <a:xfrm>
+            <a:off x="1371600" y="2130552"/>
+            <a:ext cx="2286000" cy="320040"/>
+          </a:xfrm>
+          <a:prstGeom prst="rect">
+            <a:avLst/>
+          </a:prstGeom>
+          <a:noFill/>
+          <a:ln/>
+        </p:spPr>
+        <p:txBody>
+          <a:bodyPr wrap="square" rtlCol="0" anchor="ctr">
+            <a:normAutofit/>
+          </a:bodyPr>
+          <a:lstStyle/>
+          <a:p>
+            <a:pPr indent="0" marL="0">
+              <a:buNone/>
+            </a:pPr>
+            <a:r>
+              <a:rPr lang="en-US" sz="1200" dirty="0">
+                <a:solidFill>
+                  <a:srgbClr val="374151"/>
+                </a:solidFill>
+                <a:latin typeface="Calibri" pitchFamily="34" charset="0"/>
+                <a:ea typeface="Calibri" pitchFamily="34" charset="-122"/>
+                <a:cs typeface="Calibri" pitchFamily="34" charset="-120"/>
+              </a:rPr>
+              <a:t>関連する過去メール・資料から文脈取得</a:t>
+            </a:r>
+            <a:endParaRPr lang="en-US" sz="1200" dirty="0"/>
+          </a:p>
+        </p:txBody>
+      </p:sp>
+      <p:sp>
+        <p:nvSpPr>
+          <p:cNvPr id="15" name="Text 13"/>
+          <p:cNvSpPr/>
+          <p:nvPr/>
+        </p:nvSpPr>
+        <p:spPr>
+          <a:xfrm>
+            <a:off x="685800" y="2651760"/>
+            <a:ext cx="457200" cy="457200"/>
+          </a:xfrm>
+          <a:prstGeom prst="ellipse">
+            <a:avLst/>
+          </a:prstGeom>
+          <a:solidFill>
+            <a:srgbClr val="2563EB"/>
+          </a:solidFill>
+          <a:ln/>
+        </p:spPr>
+        <p:txBody>
+          <a:bodyPr wrap="square" rtlCol="0" anchor="ctr">
+            <a:normAutofit/>
+          </a:bodyPr>
+          <a:lstStyle/>
+          <a:p>
             <a:pPr algn="ctr" indent="0" marL="0">
               <a:buNone/>
             </a:pPr>
             <a:r>
+              <a:rPr lang="en-US" sz="2000" b="1" dirty="0">
+                <a:solidFill>
+                  <a:srgbClr val="FFFFFF"/>
+                </a:solidFill>
+                <a:latin typeface="Calibri" pitchFamily="34" charset="0"/>
+                <a:ea typeface="Calibri" pitchFamily="34" charset="-122"/>
+                <a:cs typeface="Calibri" pitchFamily="34" charset="-120"/>
+              </a:rPr>
+              <a:t>3</a:t>
+            </a:r>
+            <a:endParaRPr lang="en-US" sz="2000" dirty="0"/>
+          </a:p>
+        </p:txBody>
+      </p:sp>
+      <p:sp>
+        <p:nvSpPr>
+          <p:cNvPr id="16" name="Text 14"/>
+          <p:cNvSpPr/>
+          <p:nvPr/>
+        </p:nvSpPr>
+        <p:spPr>
+          <a:xfrm>
+            <a:off x="1371600" y="2670048"/>
+            <a:ext cx="2286000" cy="320040"/>
+          </a:xfrm>
+          <a:prstGeom prst="rect">
+            <a:avLst/>
+          </a:prstGeom>
+          <a:noFill/>
+          <a:ln/>
+        </p:spPr>
+        <p:txBody>
+          <a:bodyPr wrap="square" rtlCol="0" anchor="ctr">
+            <a:normAutofit/>
+          </a:bodyPr>
+          <a:lstStyle/>
+          <a:p>
+            <a:pPr indent="0" marL="0">
+              <a:buNone/>
+            </a:pPr>
+            <a:r>
               <a:rPr lang="en-US" sz="1600" b="1" dirty="0">
                 <a:solidFill>
-                  <a:srgbClr val="2563EB"/>
-                </a:solidFill>
-                <a:latin typeface="Calibri" pitchFamily="34" charset="0"/>
-                <a:ea typeface="Calibri" pitchFamily="34" charset="-122"/>
-                <a:cs typeface="Calibri" pitchFamily="34" charset="-120"/>
-              </a:rPr>
-              <a:t>自動検索</a:t>
+                  <a:srgbClr val="111827"/>
+                </a:solidFill>
+                <a:latin typeface="Calibri" pitchFamily="34" charset="0"/>
+                <a:ea typeface="Calibri" pitchFamily="34" charset="-122"/>
+                <a:cs typeface="Calibri" pitchFamily="34" charset="-120"/>
+              </a:rPr>
+              <a:t>返信案の生成</a:t>
             </a:r>
             <a:endParaRPr lang="en-US" sz="1600" dirty="0"/>
           </a:p>
@@ -6210,19 +6123,62 @@
       </p:sp>
       <p:sp>
         <p:nvSpPr>
-          <p:cNvPr id="13" name="Text 11"/>
-          <p:cNvSpPr/>
-          <p:nvPr/>
-        </p:nvSpPr>
-        <p:spPr>
-          <a:xfrm>
-            <a:off x="1005840" y="2423160"/>
-            <a:ext cx="2011680" cy="1051560"/>
-          </a:xfrm>
-          <a:prstGeom prst="rect">
-            <a:avLst/>
-          </a:prstGeom>
-          <a:noFill/>
+          <p:cNvPr id="17" name="Text 15"/>
+          <p:cNvSpPr/>
+          <p:nvPr/>
+        </p:nvSpPr>
+        <p:spPr>
+          <a:xfrm>
+            <a:off x="1371600" y="2999232"/>
+            <a:ext cx="2286000" cy="320040"/>
+          </a:xfrm>
+          <a:prstGeom prst="rect">
+            <a:avLst/>
+          </a:prstGeom>
+          <a:noFill/>
+          <a:ln/>
+        </p:spPr>
+        <p:txBody>
+          <a:bodyPr wrap="square" rtlCol="0" anchor="ctr">
+            <a:normAutofit/>
+          </a:bodyPr>
+          <a:lstStyle/>
+          <a:p>
+            <a:pPr indent="0" marL="0">
+              <a:buNone/>
+            </a:pPr>
+            <a:r>
+              <a:rPr lang="en-US" sz="1200" dirty="0">
+                <a:solidFill>
+                  <a:srgbClr val="374151"/>
+                </a:solidFill>
+                <a:latin typeface="Calibri" pitchFamily="34" charset="0"/>
+                <a:ea typeface="Calibri" pitchFamily="34" charset="-122"/>
+                <a:cs typeface="Calibri" pitchFamily="34" charset="-120"/>
+              </a:rPr>
+              <a:t>トーン・内容・署名まで完全な返信を生成</a:t>
+            </a:r>
+            <a:endParaRPr lang="en-US" sz="1200" dirty="0"/>
+          </a:p>
+        </p:txBody>
+      </p:sp>
+      <p:sp>
+        <p:nvSpPr>
+          <p:cNvPr id="18" name="Text 16"/>
+          <p:cNvSpPr/>
+          <p:nvPr/>
+        </p:nvSpPr>
+        <p:spPr>
+          <a:xfrm>
+            <a:off x="685800" y="3520440"/>
+            <a:ext cx="457200" cy="457200"/>
+          </a:xfrm>
+          <a:prstGeom prst="ellipse">
+            <a:avLst/>
+          </a:prstGeom>
+          <a:solidFill>
+            <a:srgbClr val="2563EB"/>
+          </a:solidFill>
           <a:ln/>
         </p:spPr>
         <p:txBody>
@@ -6232,13 +6188,92 @@
           <a:lstStyle/>
           <a:p>
             <a:pPr algn="ctr" indent="0" marL="0">
-              <a:lnSpc>
-                <a:spcPct val="130000"/>
-              </a:lnSpc>
-              <a:buNone/>
-            </a:pPr>
-            <a:r>
-              <a:rPr lang="en-US" sz="1400" dirty="0">
+              <a:buNone/>
+            </a:pPr>
+            <a:r>
+              <a:rPr lang="en-US" sz="2000" b="1" dirty="0">
+                <a:solidFill>
+                  <a:srgbClr val="FFFFFF"/>
+                </a:solidFill>
+                <a:latin typeface="Calibri" pitchFamily="34" charset="0"/>
+                <a:ea typeface="Calibri" pitchFamily="34" charset="-122"/>
+                <a:cs typeface="Calibri" pitchFamily="34" charset="-120"/>
+              </a:rPr>
+              <a:t>4</a:t>
+            </a:r>
+            <a:endParaRPr lang="en-US" sz="2000" dirty="0"/>
+          </a:p>
+        </p:txBody>
+      </p:sp>
+      <p:sp>
+        <p:nvSpPr>
+          <p:cNvPr id="19" name="Text 17"/>
+          <p:cNvSpPr/>
+          <p:nvPr/>
+        </p:nvSpPr>
+        <p:spPr>
+          <a:xfrm>
+            <a:off x="1371600" y="3538728"/>
+            <a:ext cx="2286000" cy="320040"/>
+          </a:xfrm>
+          <a:prstGeom prst="rect">
+            <a:avLst/>
+          </a:prstGeom>
+          <a:noFill/>
+          <a:ln/>
+        </p:spPr>
+        <p:txBody>
+          <a:bodyPr wrap="square" rtlCol="0" anchor="ctr">
+            <a:normAutofit/>
+          </a:bodyPr>
+          <a:lstStyle/>
+          <a:p>
+            <a:pPr indent="0" marL="0">
+              <a:buNone/>
+            </a:pPr>
+            <a:r>
+              <a:rPr lang="en-US" sz="1600" b="1" dirty="0">
+                <a:solidFill>
+                  <a:srgbClr val="111827"/>
+                </a:solidFill>
+                <a:latin typeface="Calibri" pitchFamily="34" charset="0"/>
+                <a:ea typeface="Calibri" pitchFamily="34" charset="-122"/>
+                <a:cs typeface="Calibri" pitchFamily="34" charset="-120"/>
+              </a:rPr>
+              <a:t>ユーザーレビュー</a:t>
+            </a:r>
+            <a:endParaRPr lang="en-US" sz="1600" dirty="0"/>
+          </a:p>
+        </p:txBody>
+      </p:sp>
+      <p:sp>
+        <p:nvSpPr>
+          <p:cNvPr id="20" name="Text 18"/>
+          <p:cNvSpPr/>
+          <p:nvPr/>
+        </p:nvSpPr>
+        <p:spPr>
+          <a:xfrm>
+            <a:off x="1371600" y="3867912"/>
+            <a:ext cx="2286000" cy="320040"/>
+          </a:xfrm>
+          <a:prstGeom prst="rect">
+            <a:avLst/>
+          </a:prstGeom>
+          <a:noFill/>
+          <a:ln/>
+        </p:spPr>
+        <p:txBody>
+          <a:bodyPr wrap="square" rtlCol="0" anchor="ctr">
+            <a:normAutofit/>
+          </a:bodyPr>
+          <a:lstStyle/>
+          <a:p>
+            <a:pPr indent="0" marL="0">
+              <a:buNone/>
+            </a:pPr>
+            <a:r>
+              <a:rPr lang="en-US" sz="1200" dirty="0">
                 <a:solidFill>
                   <a:srgbClr val="374151"/>
                 </a:solidFill>
@@ -6246,353 +6281,9 @@
                 <a:ea typeface="Calibri" pitchFamily="34" charset="-122"/>
                 <a:cs typeface="Calibri" pitchFamily="34" charset="-120"/>
               </a:rPr>
-              <a:t>複数のスプレッドシート</a:t>
-            </a:r>
-            <a:endParaRPr lang="en-US" sz="1400" dirty="0"/>
-          </a:p>
-          <a:p>
-            <a:pPr algn="ctr" indent="0" marL="0">
-              <a:lnSpc>
-                <a:spcPct val="130000"/>
-              </a:lnSpc>
-              <a:buNone/>
-            </a:pPr>
-            <a:r>
-              <a:rPr lang="en-US" sz="1400" dirty="0">
-                <a:solidFill>
-                  <a:srgbClr val="374151"/>
-                </a:solidFill>
-                <a:latin typeface="Calibri" pitchFamily="34" charset="0"/>
-                <a:ea typeface="Calibri" pitchFamily="34" charset="-122"/>
-                <a:cs typeface="Calibri" pitchFamily="34" charset="-120"/>
-              </a:rPr>
-              <a:t>ドキュメント・PDF から</a:t>
-            </a:r>
-            <a:endParaRPr lang="en-US" sz="1400" dirty="0"/>
-          </a:p>
-          <a:p>
-            <a:pPr algn="ctr" indent="0" marL="0">
-              <a:lnSpc>
-                <a:spcPct val="130000"/>
-              </a:lnSpc>
-              <a:buNone/>
-            </a:pPr>
-            <a:r>
-              <a:rPr lang="en-US" sz="1400" dirty="0">
-                <a:solidFill>
-                  <a:srgbClr val="374151"/>
-                </a:solidFill>
-                <a:latin typeface="Calibri" pitchFamily="34" charset="0"/>
-                <a:ea typeface="Calibri" pitchFamily="34" charset="-122"/>
-                <a:cs typeface="Calibri" pitchFamily="34" charset="-120"/>
-              </a:rPr>
-              <a:t>関連情報を自動抽出</a:t>
-            </a:r>
-            <a:endParaRPr lang="en-US" sz="1400" dirty="0"/>
-          </a:p>
-        </p:txBody>
-      </p:sp>
-      <p:sp>
-        <p:nvSpPr>
-          <p:cNvPr id="14" name="Shape 12"/>
-          <p:cNvSpPr/>
-          <p:nvPr/>
-        </p:nvSpPr>
-        <p:spPr>
-          <a:xfrm>
-            <a:off x="3429000" y="1828800"/>
-            <a:ext cx="2286000" cy="1828800"/>
-          </a:xfrm>
-          <a:prstGeom prst="rect">
-            <a:avLst>
-              <a:gd name="adj" fmla="val 2500"/>
-            </a:avLst>
-          </a:prstGeom>
-          <a:solidFill>
-            <a:srgbClr val="D1FAE5"/>
-          </a:solidFill>
-          <a:ln w="12700">
-            <a:solidFill>
-              <a:srgbClr val="059669"/>
-            </a:solidFill>
-            <a:prstDash val="solid"/>
-          </a:ln>
-        </p:spPr>
-      </p:sp>
-      <p:sp>
-        <p:nvSpPr>
-          <p:cNvPr id="15" name="Text 13"/>
-          <p:cNvSpPr/>
-          <p:nvPr/>
-        </p:nvSpPr>
-        <p:spPr>
-          <a:xfrm>
-            <a:off x="3429000" y="2057400"/>
-            <a:ext cx="2286000" cy="320040"/>
-          </a:xfrm>
-          <a:prstGeom prst="rect">
-            <a:avLst/>
-          </a:prstGeom>
-          <a:noFill/>
-          <a:ln/>
-        </p:spPr>
-        <p:txBody>
-          <a:bodyPr wrap="square" rtlCol="0" anchor="ctr">
-            <a:normAutofit/>
-          </a:bodyPr>
-          <a:lstStyle/>
-          <a:p>
-            <a:pPr algn="ctr" indent="0" marL="0">
-              <a:buNone/>
-            </a:pPr>
-            <a:r>
-              <a:rPr lang="en-US" sz="1600" b="1" dirty="0">
-                <a:solidFill>
-                  <a:srgbClr val="059669"/>
-                </a:solidFill>
-                <a:latin typeface="Calibri" pitchFamily="34" charset="0"/>
-                <a:ea typeface="Calibri" pitchFamily="34" charset="-122"/>
-                <a:cs typeface="Calibri" pitchFamily="34" charset="-120"/>
-              </a:rPr>
-              <a:t>自動要約</a:t>
-            </a:r>
-            <a:endParaRPr lang="en-US" sz="1600" dirty="0"/>
-          </a:p>
-        </p:txBody>
-      </p:sp>
-      <p:sp>
-        <p:nvSpPr>
-          <p:cNvPr id="16" name="Text 14"/>
-          <p:cNvSpPr/>
-          <p:nvPr/>
-        </p:nvSpPr>
-        <p:spPr>
-          <a:xfrm>
-            <a:off x="3566160" y="2423160"/>
-            <a:ext cx="2011680" cy="1051560"/>
-          </a:xfrm>
-          <a:prstGeom prst="rect">
-            <a:avLst/>
-          </a:prstGeom>
-          <a:noFill/>
-          <a:ln/>
-        </p:spPr>
-        <p:txBody>
-          <a:bodyPr wrap="square" rtlCol="0" anchor="ctr">
-            <a:normAutofit/>
-          </a:bodyPr>
-          <a:lstStyle/>
-          <a:p>
-            <a:pPr algn="ctr" indent="0" marL="0">
-              <a:lnSpc>
-                <a:spcPct val="130000"/>
-              </a:lnSpc>
-              <a:buNone/>
-            </a:pPr>
-            <a:r>
-              <a:rPr lang="en-US" sz="1400" dirty="0">
-                <a:solidFill>
-                  <a:srgbClr val="374151"/>
-                </a:solidFill>
-                <a:latin typeface="Calibri" pitchFamily="34" charset="0"/>
-                <a:ea typeface="Calibri" pitchFamily="34" charset="-122"/>
-                <a:cs typeface="Calibri" pitchFamily="34" charset="-120"/>
-              </a:rPr>
-              <a:t>バラバラの情報を</a:t>
-            </a:r>
-            <a:endParaRPr lang="en-US" sz="1400" dirty="0"/>
-          </a:p>
-          <a:p>
-            <a:pPr algn="ctr" indent="0" marL="0">
-              <a:lnSpc>
-                <a:spcPct val="130000"/>
-              </a:lnSpc>
-              <a:buNone/>
-            </a:pPr>
-            <a:r>
-              <a:rPr lang="en-US" sz="1400" dirty="0">
-                <a:solidFill>
-                  <a:srgbClr val="374151"/>
-                </a:solidFill>
-                <a:latin typeface="Calibri" pitchFamily="34" charset="0"/>
-                <a:ea typeface="Calibri" pitchFamily="34" charset="-122"/>
-                <a:cs typeface="Calibri" pitchFamily="34" charset="-120"/>
-              </a:rPr>
-              <a:t>統合して要約提示</a:t>
-            </a:r>
-            <a:endParaRPr lang="en-US" sz="1400" dirty="0"/>
-          </a:p>
-          <a:p>
-            <a:pPr algn="ctr" indent="0" marL="0">
-              <a:lnSpc>
-                <a:spcPct val="130000"/>
-              </a:lnSpc>
-              <a:buNone/>
-            </a:pPr>
-            <a:r>
-              <a:rPr lang="en-US" sz="1400" dirty="0">
-                <a:solidFill>
-                  <a:srgbClr val="374151"/>
-                </a:solidFill>
-                <a:latin typeface="Calibri" pitchFamily="34" charset="0"/>
-                <a:ea typeface="Calibri" pitchFamily="34" charset="-122"/>
-                <a:cs typeface="Calibri" pitchFamily="34" charset="-120"/>
-              </a:rPr>
-              <a:t>数秒で完成</a:t>
-            </a:r>
-            <a:endParaRPr lang="en-US" sz="1400" dirty="0"/>
-          </a:p>
-        </p:txBody>
-      </p:sp>
-      <p:sp>
-        <p:nvSpPr>
-          <p:cNvPr id="17" name="Shape 15"/>
-          <p:cNvSpPr/>
-          <p:nvPr/>
-        </p:nvSpPr>
-        <p:spPr>
-          <a:xfrm>
-            <a:off x="5989320" y="1828800"/>
-            <a:ext cx="2286000" cy="1828800"/>
-          </a:xfrm>
-          <a:prstGeom prst="rect">
-            <a:avLst>
-              <a:gd name="adj" fmla="val 2500"/>
-            </a:avLst>
-          </a:prstGeom>
-          <a:solidFill>
-            <a:srgbClr val="D1FAE5"/>
-          </a:solidFill>
-          <a:ln w="12700">
-            <a:solidFill>
-              <a:srgbClr val="059669"/>
-            </a:solidFill>
-            <a:prstDash val="solid"/>
-          </a:ln>
-        </p:spPr>
-      </p:sp>
-      <p:sp>
-        <p:nvSpPr>
-          <p:cNvPr id="18" name="Text 16"/>
-          <p:cNvSpPr/>
-          <p:nvPr/>
-        </p:nvSpPr>
-        <p:spPr>
-          <a:xfrm>
-            <a:off x="5989320" y="2057400"/>
-            <a:ext cx="2286000" cy="320040"/>
-          </a:xfrm>
-          <a:prstGeom prst="rect">
-            <a:avLst/>
-          </a:prstGeom>
-          <a:noFill/>
-          <a:ln/>
-        </p:spPr>
-        <p:txBody>
-          <a:bodyPr wrap="square" rtlCol="0" anchor="ctr">
-            <a:normAutofit/>
-          </a:bodyPr>
-          <a:lstStyle/>
-          <a:p>
-            <a:pPr algn="ctr" indent="0" marL="0">
-              <a:buNone/>
-            </a:pPr>
-            <a:r>
-              <a:rPr lang="en-US" sz="1600" b="1" dirty="0">
-                <a:solidFill>
-                  <a:srgbClr val="059669"/>
-                </a:solidFill>
-                <a:latin typeface="Calibri" pitchFamily="34" charset="0"/>
-                <a:ea typeface="Calibri" pitchFamily="34" charset="-122"/>
-                <a:cs typeface="Calibri" pitchFamily="34" charset="-120"/>
-              </a:rPr>
-              <a:t>フォルダ不要</a:t>
-            </a:r>
-            <a:endParaRPr lang="en-US" sz="1600" dirty="0"/>
-          </a:p>
-        </p:txBody>
-      </p:sp>
-      <p:sp>
-        <p:nvSpPr>
-          <p:cNvPr id="19" name="Text 17"/>
-          <p:cNvSpPr/>
-          <p:nvPr/>
-        </p:nvSpPr>
-        <p:spPr>
-          <a:xfrm>
-            <a:off x="6126480" y="2423160"/>
-            <a:ext cx="2011680" cy="1051560"/>
-          </a:xfrm>
-          <a:prstGeom prst="rect">
-            <a:avLst/>
-          </a:prstGeom>
-          <a:noFill/>
-          <a:ln/>
-        </p:spPr>
-        <p:txBody>
-          <a:bodyPr wrap="square" rtlCol="0" anchor="ctr">
-            <a:normAutofit/>
-          </a:bodyPr>
-          <a:lstStyle/>
-          <a:p>
-            <a:pPr algn="ctr" indent="0" marL="0">
-              <a:lnSpc>
-                <a:spcPct val="130000"/>
-              </a:lnSpc>
-              <a:buNone/>
-            </a:pPr>
-            <a:r>
-              <a:rPr lang="en-US" sz="1400" dirty="0">
-                <a:solidFill>
-                  <a:srgbClr val="374151"/>
-                </a:solidFill>
-                <a:latin typeface="Calibri" pitchFamily="34" charset="0"/>
-                <a:ea typeface="Calibri" pitchFamily="34" charset="-122"/>
-                <a:cs typeface="Calibri" pitchFamily="34" charset="-120"/>
-              </a:rPr>
-              <a:t>従来の複数フォルダ</a:t>
-            </a:r>
-            <a:endParaRPr lang="en-US" sz="1400" dirty="0"/>
-          </a:p>
-          <a:p>
-            <a:pPr algn="ctr" indent="0" marL="0">
-              <a:lnSpc>
-                <a:spcPct val="130000"/>
-              </a:lnSpc>
-              <a:buNone/>
-            </a:pPr>
-            <a:r>
-              <a:rPr lang="en-US" sz="1400" dirty="0">
-                <a:solidFill>
-                  <a:srgbClr val="374151"/>
-                </a:solidFill>
-                <a:latin typeface="Calibri" pitchFamily="34" charset="0"/>
-                <a:ea typeface="Calibri" pitchFamily="34" charset="-122"/>
-                <a:cs typeface="Calibri" pitchFamily="34" charset="-120"/>
-              </a:rPr>
-              <a:t>掘り下げが不要</a:t>
-            </a:r>
-            <a:endParaRPr lang="en-US" sz="1400" dirty="0"/>
-          </a:p>
-          <a:p>
-            <a:pPr algn="ctr" indent="0" marL="0">
-              <a:lnSpc>
-                <a:spcPct val="130000"/>
-              </a:lnSpc>
-              <a:buNone/>
-            </a:pPr>
-            <a:r>
-              <a:rPr lang="en-US" sz="1400" dirty="0">
-                <a:solidFill>
-                  <a:srgbClr val="374151"/>
-                </a:solidFill>
-                <a:latin typeface="Calibri" pitchFamily="34" charset="0"/>
-                <a:ea typeface="Calibri" pitchFamily="34" charset="-122"/>
-                <a:cs typeface="Calibri" pitchFamily="34" charset="-120"/>
-              </a:rPr>
-              <a:t>時間削減が実現</a:t>
-            </a:r>
-            <a:endParaRPr lang="en-US" sz="1400" dirty="0"/>
+              <a:t>生成案を確認・修正してから送信</a:t>
+            </a:r>
+            <a:endParaRPr lang="en-US" sz="1200" dirty="0"/>
           </a:p>
         </p:txBody>
       </p:sp>
@@ -6657,7 +6348,7 @@
         <p:spPr>
           <a:xfrm>
             <a:off x="685800" y="137160"/>
-            <a:ext cx="914400" cy="256032"/>
+            <a:ext cx="2231136" cy="256032"/>
           </a:xfrm>
           <a:prstGeom prst="rect">
             <a:avLst>
@@ -6679,7 +6370,7 @@
         <p:spPr>
           <a:xfrm>
             <a:off x="685800" y="137160"/>
-            <a:ext cx="914400" cy="256032"/>
+            <a:ext cx="2231136" cy="256032"/>
           </a:xfrm>
           <a:prstGeom prst="rect">
             <a:avLst/>
@@ -6705,7 +6396,7 @@
                 <a:ea typeface="Calibri" pitchFamily="34" charset="-122"/>
                 <a:cs typeface="Calibri" pitchFamily="34" charset="-120"/>
               </a:rPr>
-              <a:t>DRIVE</a:t>
+              <a:t>DRIVE INTEGRATION</a:t>
             </a:r>
             <a:endParaRPr lang="en-US" sz="1000" dirty="0"/>
           </a:p>
@@ -6746,7 +6437,7 @@
                 <a:ea typeface="Calibri" pitchFamily="34" charset="-122"/>
                 <a:cs typeface="Calibri" pitchFamily="34" charset="-120"/>
               </a:rPr>
-              <a:t>Google ドライブ統合② ドキュメント作成支援</a:t>
+              <a:t>Google ドライブ統合: 情報の再利用</a:t>
             </a:r>
             <a:endParaRPr lang="en-US" sz="2400" dirty="0"/>
           </a:p>
@@ -6865,20 +6556,20 @@
         </p:nvSpPr>
         <p:spPr>
           <a:xfrm>
-            <a:off x="685800" y="822960"/>
-            <a:ext cx="7772400" cy="914400"/>
+            <a:off x="868680" y="914400"/>
+            <a:ext cx="2286000" cy="1828800"/>
           </a:xfrm>
           <a:prstGeom prst="rect">
             <a:avLst>
-              <a:gd name="adj" fmla="val 5000"/>
+              <a:gd name="adj" fmla="val 2500"/>
             </a:avLst>
           </a:prstGeom>
           <a:solidFill>
-            <a:srgbClr val="FAFBFC"/>
+            <a:srgbClr val="DBEAFE"/>
           </a:solidFill>
-          <a:ln w="6350">
+          <a:ln w="12700">
             <a:solidFill>
-              <a:srgbClr val="E5E7EB"/>
+              <a:srgbClr val="2563EB"/>
             </a:solidFill>
             <a:prstDash val="solid"/>
           </a:ln>
@@ -6892,34 +6583,34 @@
         </p:nvSpPr>
         <p:spPr>
           <a:xfrm>
-            <a:off x="960120" y="868680"/>
-            <a:ext cx="6400800" cy="274320"/>
-          </a:xfrm>
-          <a:prstGeom prst="rect">
-            <a:avLst/>
-          </a:prstGeom>
-          <a:noFill/>
-          <a:ln/>
-        </p:spPr>
-        <p:txBody>
-          <a:bodyPr wrap="square" rtlCol="0" anchor="ctr">
-            <a:normAutofit/>
-          </a:bodyPr>
-          <a:lstStyle/>
-          <a:p>
-            <a:pPr indent="0" marL="0">
+            <a:off x="868680" y="1143000"/>
+            <a:ext cx="2286000" cy="320040"/>
+          </a:xfrm>
+          <a:prstGeom prst="rect">
+            <a:avLst/>
+          </a:prstGeom>
+          <a:noFill/>
+          <a:ln/>
+        </p:spPr>
+        <p:txBody>
+          <a:bodyPr wrap="square" rtlCol="0" anchor="ctr">
+            <a:normAutofit/>
+          </a:bodyPr>
+          <a:lstStyle/>
+          <a:p>
+            <a:pPr algn="ctr" indent="0" marL="0">
               <a:buNone/>
             </a:pPr>
             <a:r>
               <a:rPr lang="en-US" sz="1600" b="1" dirty="0">
                 <a:solidFill>
-                  <a:srgbClr val="111827"/>
-                </a:solidFill>
-                <a:latin typeface="Calibri" pitchFamily="34" charset="0"/>
-                <a:ea typeface="Calibri" pitchFamily="34" charset="-122"/>
-                <a:cs typeface="Calibri" pitchFamily="34" charset="-120"/>
-              </a:rPr>
-              <a:t>テンプレートに基づいた自動生成</a:t>
+                  <a:srgbClr val="2563EB"/>
+                </a:solidFill>
+                <a:latin typeface="Calibri" pitchFamily="34" charset="0"/>
+                <a:ea typeface="Calibri" pitchFamily="34" charset="-122"/>
+                <a:cs typeface="Calibri" pitchFamily="34" charset="-120"/>
+              </a:rPr>
+              <a:t>自動検索</a:t>
             </a:r>
             <a:endParaRPr lang="en-US" sz="1600" dirty="0"/>
           </a:p>
@@ -6933,24 +6624,24 @@
         </p:nvSpPr>
         <p:spPr>
           <a:xfrm>
-            <a:off x="960120" y="1143000"/>
-            <a:ext cx="6400800" cy="502920"/>
-          </a:xfrm>
-          <a:prstGeom prst="rect">
-            <a:avLst/>
-          </a:prstGeom>
-          <a:noFill/>
-          <a:ln/>
-        </p:spPr>
-        <p:txBody>
-          <a:bodyPr wrap="square" rtlCol="0" anchor="ctr">
-            <a:normAutofit/>
-          </a:bodyPr>
-          <a:lstStyle/>
-          <a:p>
-            <a:pPr indent="0" marL="0">
+            <a:off x="1005840" y="1508760"/>
+            <a:ext cx="2011680" cy="1051560"/>
+          </a:xfrm>
+          <a:prstGeom prst="rect">
+            <a:avLst/>
+          </a:prstGeom>
+          <a:noFill/>
+          <a:ln/>
+        </p:spPr>
+        <p:txBody>
+          <a:bodyPr wrap="square" rtlCol="0" anchor="ctr">
+            <a:normAutofit/>
+          </a:bodyPr>
+          <a:lstStyle/>
+          <a:p>
+            <a:pPr algn="ctr" indent="0" marL="0">
               <a:lnSpc>
-                <a:spcPct val="120000"/>
+                <a:spcPct val="130000"/>
               </a:lnSpc>
               <a:buNone/>
             </a:pPr>
@@ -6963,14 +6654,14 @@
                 <a:ea typeface="Calibri" pitchFamily="34" charset="-122"/>
                 <a:cs typeface="Calibri" pitchFamily="34" charset="-120"/>
               </a:rPr>
-              <a:t>去年の営業報告書をドライブから選択</a:t>
+              <a:t>「去年のプロジェクト資料」と言うだけで</a:t>
             </a:r>
             <a:endParaRPr lang="en-US" sz="1400" dirty="0"/>
           </a:p>
           <a:p>
-            <a:pPr indent="0" marL="0">
+            <a:pPr algn="ctr" indent="0" marL="0">
               <a:lnSpc>
-                <a:spcPct val="120000"/>
+                <a:spcPct val="130000"/>
               </a:lnSpc>
               <a:buNone/>
             </a:pPr>
@@ -6983,30 +6674,10 @@
                 <a:ea typeface="Calibri" pitchFamily="34" charset="-122"/>
                 <a:cs typeface="Calibri" pitchFamily="34" charset="-120"/>
               </a:rPr>
-              <a:t>「今年の営業報告書を、去年と同じ形式で作成」</a:t>
+              <a:t>関連ファイルを自動抽出</a:t>
             </a:r>
             <a:endParaRPr lang="en-US" sz="1400" dirty="0"/>
           </a:p>
-          <a:p>
-            <a:pPr indent="0" marL="0">
-              <a:lnSpc>
-                <a:spcPct val="120000"/>
-              </a:lnSpc>
-              <a:buNone/>
-            </a:pPr>
-            <a:r>
-              <a:rPr lang="en-US" sz="1400" dirty="0">
-                <a:solidFill>
-                  <a:srgbClr val="374151"/>
-                </a:solidFill>
-                <a:latin typeface="Calibri" pitchFamily="34" charset="0"/>
-                <a:ea typeface="Calibri" pitchFamily="34" charset="-122"/>
-                <a:cs typeface="Calibri" pitchFamily="34" charset="-120"/>
-              </a:rPr>
-              <a:t>→ 骨組みが自動生成。数字と事例を差し替えるだけで完成</a:t>
-            </a:r>
-            <a:endParaRPr lang="en-US" sz="1400" dirty="0"/>
-          </a:p>
         </p:txBody>
       </p:sp>
       <p:sp>
@@ -7017,12 +6688,12 @@
         </p:nvSpPr>
         <p:spPr>
           <a:xfrm>
-            <a:off x="868680" y="2103120"/>
-            <a:ext cx="2286000" cy="1645920"/>
+            <a:off x="3429000" y="914400"/>
+            <a:ext cx="2286000" cy="1828800"/>
           </a:xfrm>
           <a:prstGeom prst="rect">
             <a:avLst>
-              <a:gd name="adj" fmla="val 2778"/>
+              <a:gd name="adj" fmla="val 2500"/>
             </a:avLst>
           </a:prstGeom>
           <a:solidFill>
@@ -7044,7 +6715,7 @@
         </p:nvSpPr>
         <p:spPr>
           <a:xfrm>
-            <a:off x="868680" y="2331720"/>
+            <a:off x="3429000" y="1143000"/>
             <a:ext cx="2286000" cy="320040"/>
           </a:xfrm>
           <a:prstGeom prst="rect">
@@ -7071,7 +6742,7 @@
                 <a:ea typeface="Calibri" pitchFamily="34" charset="-122"/>
                 <a:cs typeface="Calibri" pitchFamily="34" charset="-120"/>
               </a:rPr>
-              <a:t>形式統一</a:t>
+              <a:t>要約・抽出</a:t>
             </a:r>
             <a:endParaRPr lang="en-US" sz="1600" dirty="0"/>
           </a:p>
@@ -7085,8 +6756,8 @@
         </p:nvSpPr>
         <p:spPr>
           <a:xfrm>
-            <a:off x="1005840" y="2697480"/>
-            <a:ext cx="2011680" cy="868680"/>
+            <a:off x="3566160" y="1508760"/>
+            <a:ext cx="2011680" cy="1051560"/>
           </a:xfrm>
           <a:prstGeom prst="rect">
             <a:avLst/>
@@ -7115,7 +6786,7 @@
                 <a:ea typeface="Calibri" pitchFamily="34" charset="-122"/>
                 <a:cs typeface="Calibri" pitchFamily="34" charset="-120"/>
               </a:rPr>
-              <a:t>毎年・毎月ドキュメントの</a:t>
+              <a:t>PDF・スプレッドシートから</a:t>
             </a:r>
             <a:endParaRPr lang="en-US" sz="1400" dirty="0"/>
           </a:p>
@@ -7135,7 +6806,7 @@
                 <a:ea typeface="Calibri" pitchFamily="34" charset="-122"/>
                 <a:cs typeface="Calibri" pitchFamily="34" charset="-120"/>
               </a:rPr>
-              <a:t>形式が自動で統一される</a:t>
+              <a:t>必要なデータだけを抽出</a:t>
             </a:r>
             <a:endParaRPr lang="en-US" sz="1400" dirty="0"/>
           </a:p>
@@ -7149,20 +6820,20 @@
         </p:nvSpPr>
         <p:spPr>
           <a:xfrm>
-            <a:off x="3429000" y="2103120"/>
-            <a:ext cx="2286000" cy="1645920"/>
+            <a:off x="5989320" y="914400"/>
+            <a:ext cx="2286000" cy="1828800"/>
           </a:xfrm>
           <a:prstGeom prst="rect">
             <a:avLst>
-              <a:gd name="adj" fmla="val 2778"/>
+              <a:gd name="adj" fmla="val 2500"/>
             </a:avLst>
           </a:prstGeom>
           <a:solidFill>
-            <a:srgbClr val="D1FAE5"/>
+            <a:srgbClr val="FEF3C7"/>
           </a:solidFill>
           <a:ln w="12700">
             <a:solidFill>
-              <a:srgbClr val="059669"/>
+              <a:srgbClr val="D97706"/>
             </a:solidFill>
             <a:prstDash val="solid"/>
           </a:ln>
@@ -7176,7 +6847,7 @@
         </p:nvSpPr>
         <p:spPr>
           <a:xfrm>
-            <a:off x="3429000" y="2331720"/>
+            <a:off x="5989320" y="1143000"/>
             <a:ext cx="2286000" cy="320040"/>
           </a:xfrm>
           <a:prstGeom prst="rect">
@@ -7197,33 +6868,16 @@
             <a:r>
               <a:rPr lang="en-US" sz="1600" b="1" dirty="0">
                 <a:solidFill>
-                  <a:srgbClr val="059669"/>
-                </a:solidFill>
-                <a:latin typeface="Calibri" pitchFamily="34" charset="0"/>
-                <a:ea typeface="Calibri" pitchFamily="34" charset="-122"/>
-                <a:cs typeface="Calibri" pitchFamily="34" charset="-120"/>
-              </a:rPr>
-              <a:t>入力時間</a:t>
+                  <a:srgbClr val="D97706"/>
+                </a:solidFill>
+                <a:latin typeface="Calibri" pitchFamily="34" charset="0"/>
+                <a:ea typeface="Calibri" pitchFamily="34" charset="-122"/>
+                <a:cs typeface="Calibri" pitchFamily="34" charset="-120"/>
+              </a:rPr>
+              <a:t>カスタマイズ</a:t>
             </a:r>
             <a:endParaRPr lang="en-US" sz="1600" dirty="0"/>
           </a:p>
-          <a:p>
-            <a:pPr algn="ctr" indent="0" marL="0">
-              <a:buNone/>
-            </a:pPr>
-            <a:r>
-              <a:rPr lang="en-US" sz="1600" b="1" dirty="0">
-                <a:solidFill>
-                  <a:srgbClr val="059669"/>
-                </a:solidFill>
-                <a:latin typeface="Calibri" pitchFamily="34" charset="0"/>
-                <a:ea typeface="Calibri" pitchFamily="34" charset="-122"/>
-                <a:cs typeface="Calibri" pitchFamily="34" charset="-120"/>
-              </a:rPr>
-              <a:t>削減</a:t>
-            </a:r>
-            <a:endParaRPr lang="en-US" sz="1600" dirty="0"/>
-          </a:p>
         </p:txBody>
       </p:sp>
       <p:sp>
@@ -7234,8 +6888,8 @@
         </p:nvSpPr>
         <p:spPr>
           <a:xfrm>
-            <a:off x="3566160" y="2697480"/>
-            <a:ext cx="2011680" cy="868680"/>
+            <a:off x="6126480" y="1508760"/>
+            <a:ext cx="2011680" cy="1051560"/>
           </a:xfrm>
           <a:prstGeom prst="rect">
             <a:avLst/>
@@ -7264,7 +6918,7 @@
                 <a:ea typeface="Calibri" pitchFamily="34" charset="-122"/>
                 <a:cs typeface="Calibri" pitchFamily="34" charset="-120"/>
               </a:rPr>
-              <a:t>テンプレ作成が無くなり</a:t>
+              <a:t>抽出した情報をベースに</a:t>
             </a:r>
             <a:endParaRPr lang="en-US" sz="1400" dirty="0"/>
           </a:p>
@@ -7284,7 +6938,7 @@
                 <a:ea typeface="Calibri" pitchFamily="34" charset="-122"/>
                 <a:cs typeface="Calibri" pitchFamily="34" charset="-120"/>
               </a:rPr>
-              <a:t>差し替えだけで完成</a:t>
+              <a:t>新規メール・資料を作成</a:t>
             </a:r>
             <a:endParaRPr lang="en-US" sz="1400" dirty="0"/>
           </a:p>
@@ -7298,23 +6952,18 @@
         </p:nvSpPr>
         <p:spPr>
           <a:xfrm>
-            <a:off x="5989320" y="2103120"/>
-            <a:ext cx="2286000" cy="1645920"/>
+            <a:off x="685800" y="3200400"/>
+            <a:ext cx="7772400" cy="365760"/>
           </a:xfrm>
           <a:prstGeom prst="rect">
             <a:avLst>
-              <a:gd name="adj" fmla="val 2778"/>
+              <a:gd name="adj" fmla="val 10000"/>
             </a:avLst>
           </a:prstGeom>
           <a:solidFill>
-            <a:srgbClr val="D1FAE5"/>
+            <a:srgbClr val="DBEAFE"/>
           </a:solidFill>
-          <a:ln w="12700">
-            <a:solidFill>
-              <a:srgbClr val="059669"/>
-            </a:solidFill>
-            <a:prstDash val="solid"/>
-          </a:ln>
+          <a:ln/>
         </p:spPr>
       </p:sp>
       <p:sp>
@@ -7325,117 +6974,36 @@
         </p:nvSpPr>
         <p:spPr>
           <a:xfrm>
-            <a:off x="5989320" y="2331720"/>
-            <a:ext cx="2286000" cy="320040"/>
-          </a:xfrm>
-          <a:prstGeom prst="rect">
-            <a:avLst/>
-          </a:prstGeom>
-          <a:noFill/>
-          <a:ln/>
-        </p:spPr>
-        <p:txBody>
-          <a:bodyPr wrap="square" rtlCol="0" anchor="ctr">
-            <a:normAutofit/>
-          </a:bodyPr>
-          <a:lstStyle/>
-          <a:p>
-            <a:pPr algn="ctr" indent="0" marL="0">
-              <a:buNone/>
-            </a:pPr>
-            <a:r>
-              <a:rPr lang="en-US" sz="1600" b="1" dirty="0">
-                <a:solidFill>
-                  <a:srgbClr val="059669"/>
-                </a:solidFill>
-                <a:latin typeface="Calibri" pitchFamily="34" charset="0"/>
-                <a:ea typeface="Calibri" pitchFamily="34" charset="-122"/>
-                <a:cs typeface="Calibri" pitchFamily="34" charset="-120"/>
-              </a:rPr>
-              <a:t>クオリティ</a:t>
-            </a:r>
-            <a:endParaRPr lang="en-US" sz="1600" dirty="0"/>
-          </a:p>
-          <a:p>
-            <a:pPr algn="ctr" indent="0" marL="0">
-              <a:buNone/>
-            </a:pPr>
-            <a:r>
-              <a:rPr lang="en-US" sz="1600" b="1" dirty="0">
-                <a:solidFill>
-                  <a:srgbClr val="059669"/>
-                </a:solidFill>
-                <a:latin typeface="Calibri" pitchFamily="34" charset="0"/>
-                <a:ea typeface="Calibri" pitchFamily="34" charset="-122"/>
-                <a:cs typeface="Calibri" pitchFamily="34" charset="-120"/>
-              </a:rPr>
-              <a:t>維持</a:t>
-            </a:r>
-            <a:endParaRPr lang="en-US" sz="1600" dirty="0"/>
-          </a:p>
-        </p:txBody>
-      </p:sp>
-      <p:sp>
-        <p:nvSpPr>
-          <p:cNvPr id="20" name="Text 18"/>
-          <p:cNvSpPr/>
-          <p:nvPr/>
-        </p:nvSpPr>
-        <p:spPr>
-          <a:xfrm>
-            <a:off x="6126480" y="2697480"/>
-            <a:ext cx="2011680" cy="868680"/>
-          </a:xfrm>
-          <a:prstGeom prst="rect">
-            <a:avLst/>
-          </a:prstGeom>
-          <a:noFill/>
-          <a:ln/>
-        </p:spPr>
-        <p:txBody>
-          <a:bodyPr wrap="square" rtlCol="0" anchor="ctr">
-            <a:normAutofit/>
-          </a:bodyPr>
-          <a:lstStyle/>
-          <a:p>
-            <a:pPr algn="ctr" indent="0" marL="0">
-              <a:lnSpc>
-                <a:spcPct val="130000"/>
-              </a:lnSpc>
-              <a:buNone/>
-            </a:pPr>
-            <a:r>
-              <a:rPr lang="en-US" sz="1400" dirty="0">
-                <a:solidFill>
-                  <a:srgbClr val="374151"/>
-                </a:solidFill>
-                <a:latin typeface="Calibri" pitchFamily="34" charset="0"/>
-                <a:ea typeface="Calibri" pitchFamily="34" charset="-122"/>
-                <a:cs typeface="Calibri" pitchFamily="34" charset="-120"/>
-              </a:rPr>
-              <a:t>形式が一定なので</a:t>
-            </a:r>
-            <a:endParaRPr lang="en-US" sz="1400" dirty="0"/>
-          </a:p>
-          <a:p>
-            <a:pPr algn="ctr" indent="0" marL="0">
-              <a:lnSpc>
-                <a:spcPct val="130000"/>
-              </a:lnSpc>
-              <a:buNone/>
-            </a:pPr>
-            <a:r>
-              <a:rPr lang="en-US" sz="1400" dirty="0">
-                <a:solidFill>
-                  <a:srgbClr val="374151"/>
-                </a:solidFill>
-                <a:latin typeface="Calibri" pitchFamily="34" charset="0"/>
-                <a:ea typeface="Calibri" pitchFamily="34" charset="-122"/>
-                <a:cs typeface="Calibri" pitchFamily="34" charset="-120"/>
-              </a:rPr>
-              <a:t>ドキュメント品質が安定</a:t>
-            </a:r>
-            <a:endParaRPr lang="en-US" sz="1400" dirty="0"/>
+            <a:off x="822960" y="3200400"/>
+            <a:ext cx="7498080" cy="365760"/>
+          </a:xfrm>
+          <a:prstGeom prst="rect">
+            <a:avLst/>
+          </a:prstGeom>
+          <a:noFill/>
+          <a:ln/>
+        </p:spPr>
+        <p:txBody>
+          <a:bodyPr wrap="square" rtlCol="0" anchor="ctr">
+            <a:normAutofit/>
+          </a:bodyPr>
+          <a:lstStyle/>
+          <a:p>
+            <a:pPr indent="0" marL="0">
+              <a:buNone/>
+            </a:pPr>
+            <a:r>
+              <a:rPr lang="en-US" sz="1200" i="1" dirty="0">
+                <a:solidFill>
+                  <a:srgbClr val="6B7280"/>
+                </a:solidFill>
+                <a:latin typeface="Calibri" pitchFamily="34" charset="0"/>
+                <a:ea typeface="Calibri" pitchFamily="34" charset="-122"/>
+                <a:cs typeface="Calibri" pitchFamily="34" charset="-120"/>
+              </a:rPr>
+              <a:t>過去資料を『再利用』するだけで、メール作成時間が大幅短縮</a:t>
+            </a:r>
+            <a:endParaRPr lang="en-US" sz="1200" dirty="0"/>
           </a:p>
         </p:txBody>
       </p:sp>
@@ -7500,7 +7068,7 @@
         <p:spPr>
           <a:xfrm>
             <a:off x="685800" y="137160"/>
-            <a:ext cx="804672" cy="256032"/>
+            <a:ext cx="1133856" cy="256032"/>
           </a:xfrm>
           <a:prstGeom prst="rect">
             <a:avLst>
@@ -7522,7 +7090,7 @@
         <p:spPr>
           <a:xfrm>
             <a:off x="685800" y="137160"/>
-            <a:ext cx="804672" cy="256032"/>
+            <a:ext cx="1133856" cy="256032"/>
           </a:xfrm>
           <a:prstGeom prst="rect">
             <a:avLst/>
@@ -7548,7 +7116,7 @@
                 <a:ea typeface="Calibri" pitchFamily="34" charset="-122"/>
                 <a:cs typeface="Calibri" pitchFamily="34" charset="-120"/>
               </a:rPr>
-              <a:t>MEET</a:t>
+              <a:t>SYNERGY</a:t>
             </a:r>
             <a:endParaRPr lang="en-US" sz="1000" dirty="0"/>
           </a:p>
@@ -7589,7 +7157,7 @@
                 <a:ea typeface="Calibri" pitchFamily="34" charset="-122"/>
                 <a:cs typeface="Calibri" pitchFamily="34" charset="-120"/>
               </a:rPr>
-              <a:t>Google Meet 統合① 自動文字起こしと議事録</a:t>
+              <a:t>Workspace統合の相乗効果</a:t>
             </a:r>
             <a:endParaRPr lang="en-US" sz="2400" dirty="0"/>
           </a:p>
@@ -7708,18 +7276,23 @@
         </p:nvSpPr>
         <p:spPr>
           <a:xfrm>
-            <a:off x="685800" y="822960"/>
-            <a:ext cx="7772400" cy="548640"/>
+            <a:off x="685800" y="868680"/>
+            <a:ext cx="7772400" cy="1097280"/>
           </a:xfrm>
           <a:prstGeom prst="rect">
             <a:avLst>
-              <a:gd name="adj" fmla="val 8333"/>
+              <a:gd name="adj" fmla="val 4167"/>
             </a:avLst>
           </a:prstGeom>
           <a:solidFill>
-            <a:srgbClr val="DBEAFE"/>
+            <a:srgbClr val="FAFBFC"/>
           </a:solidFill>
-          <a:ln/>
+          <a:ln w="6350">
+            <a:solidFill>
+              <a:srgbClr val="E5E7EB"/>
+            </a:solidFill>
+            <a:prstDash val="solid"/>
+          </a:ln>
         </p:spPr>
       </p:sp>
       <p:sp>
@@ -7730,8 +7303,8 @@
         </p:nvSpPr>
         <p:spPr>
           <a:xfrm>
-            <a:off x="960120" y="868680"/>
-            <a:ext cx="7223760" cy="457200"/>
+            <a:off x="960120" y="914400"/>
+            <a:ext cx="7680960" cy="320040"/>
           </a:xfrm>
           <a:prstGeom prst="rect">
             <a:avLst/>
@@ -7751,13 +7324,13 @@
             <a:r>
               <a:rPr lang="en-US" sz="1600" b="1" dirty="0">
                 <a:solidFill>
-                  <a:srgbClr val="111827"/>
-                </a:solidFill>
-                <a:latin typeface="Calibri" pitchFamily="34" charset="0"/>
-                <a:ea typeface="Calibri" pitchFamily="34" charset="-122"/>
-                <a:cs typeface="Calibri" pitchFamily="34" charset="-120"/>
-              </a:rPr>
-              <a:t>会議中の発言をリアルタイム文字起こし → 会議終了後に自動議事録生成</a:t>
+                  <a:srgbClr val="2563EB"/>
+                </a:solidFill>
+                <a:latin typeface="Calibri" pitchFamily="34" charset="0"/>
+                <a:ea typeface="Calibri" pitchFamily="34" charset="-122"/>
+                <a:cs typeface="Calibri" pitchFamily="34" charset="-120"/>
+              </a:rPr>
+              <a:t>Gmail (メール返信) × ドライブ (背景情報) → 完全な返答</a:t>
             </a:r>
             <a:endParaRPr lang="en-US" sz="1600" dirty="0"/>
           </a:p>
@@ -7771,8 +7344,8 @@
         </p:nvSpPr>
         <p:spPr>
           <a:xfrm>
-            <a:off x="1143000" y="1554480"/>
-            <a:ext cx="457200" cy="457200"/>
+            <a:off x="960120" y="1280160"/>
+            <a:ext cx="7680960" cy="640080"/>
           </a:xfrm>
           <a:prstGeom prst="rect">
             <a:avLst/>
@@ -7787,47 +7360,9 @@
           <a:lstStyle/>
           <a:p>
             <a:pPr indent="0" marL="0">
-              <a:buNone/>
-            </a:pPr>
-            <a:r>
-              <a:rPr lang="en-US" sz="2000" b="1" dirty="0">
-                <a:solidFill>
-                  <a:srgbClr val="2563EB"/>
-                </a:solidFill>
-                <a:latin typeface="Calibri" pitchFamily="34" charset="0"/>
-                <a:ea typeface="Calibri" pitchFamily="34" charset="-122"/>
-                <a:cs typeface="Calibri" pitchFamily="34" charset="-120"/>
-              </a:rPr>
-              <a:t>•</a:t>
-            </a:r>
-            <a:endParaRPr lang="en-US" sz="2000" dirty="0"/>
-          </a:p>
-        </p:txBody>
-      </p:sp>
-      <p:sp>
-        <p:nvSpPr>
-          <p:cNvPr id="12" name="Text 10"/>
-          <p:cNvSpPr/>
-          <p:nvPr/>
-        </p:nvSpPr>
-        <p:spPr>
-          <a:xfrm>
-            <a:off x="1691640" y="1554480"/>
-            <a:ext cx="6400800" cy="457200"/>
-          </a:xfrm>
-          <a:prstGeom prst="rect">
-            <a:avLst/>
-          </a:prstGeom>
-          <a:noFill/>
-          <a:ln/>
-        </p:spPr>
-        <p:txBody>
-          <a:bodyPr wrap="square" rtlCol="0" anchor="ctr">
-            <a:normAutofit/>
-          </a:bodyPr>
-          <a:lstStyle/>
-          <a:p>
-            <a:pPr indent="0" marL="0">
+              <a:lnSpc>
+                <a:spcPct val="130000"/>
+              </a:lnSpc>
               <a:buNone/>
             </a:pPr>
             <a:r>
@@ -7839,318 +7374,9 @@
                 <a:ea typeface="Calibri" pitchFamily="34" charset="-122"/>
                 <a:cs typeface="Calibri" pitchFamily="34" charset="-120"/>
               </a:rPr>
-              <a:t>「何を決めたのか」を自動抽出</a:t>
+              <a:t>単体の機能ではなく、複数の Workspace ツールが連動することで、初めて業務効率化が実現する。これが Gemini の最大の強み。</a:t>
             </a:r>
             <a:endParaRPr lang="en-US" sz="1400" dirty="0"/>
-          </a:p>
-        </p:txBody>
-      </p:sp>
-      <p:sp>
-        <p:nvSpPr>
-          <p:cNvPr id="13" name="Text 11"/>
-          <p:cNvSpPr/>
-          <p:nvPr/>
-        </p:nvSpPr>
-        <p:spPr>
-          <a:xfrm>
-            <a:off x="1143000" y="2194560"/>
-            <a:ext cx="457200" cy="457200"/>
-          </a:xfrm>
-          <a:prstGeom prst="rect">
-            <a:avLst/>
-          </a:prstGeom>
-          <a:noFill/>
-          <a:ln/>
-        </p:spPr>
-        <p:txBody>
-          <a:bodyPr wrap="square" rtlCol="0" anchor="ctr">
-            <a:normAutofit/>
-          </a:bodyPr>
-          <a:lstStyle/>
-          <a:p>
-            <a:pPr indent="0" marL="0">
-              <a:buNone/>
-            </a:pPr>
-            <a:r>
-              <a:rPr lang="en-US" sz="2000" b="1" dirty="0">
-                <a:solidFill>
-                  <a:srgbClr val="2563EB"/>
-                </a:solidFill>
-                <a:latin typeface="Calibri" pitchFamily="34" charset="0"/>
-                <a:ea typeface="Calibri" pitchFamily="34" charset="-122"/>
-                <a:cs typeface="Calibri" pitchFamily="34" charset="-120"/>
-              </a:rPr>
-              <a:t>•</a:t>
-            </a:r>
-            <a:endParaRPr lang="en-US" sz="2000" dirty="0"/>
-          </a:p>
-        </p:txBody>
-      </p:sp>
-      <p:sp>
-        <p:nvSpPr>
-          <p:cNvPr id="14" name="Text 12"/>
-          <p:cNvSpPr/>
-          <p:nvPr/>
-        </p:nvSpPr>
-        <p:spPr>
-          <a:xfrm>
-            <a:off x="1691640" y="2194560"/>
-            <a:ext cx="6400800" cy="457200"/>
-          </a:xfrm>
-          <a:prstGeom prst="rect">
-            <a:avLst/>
-          </a:prstGeom>
-          <a:noFill/>
-          <a:ln/>
-        </p:spPr>
-        <p:txBody>
-          <a:bodyPr wrap="square" rtlCol="0" anchor="ctr">
-            <a:normAutofit/>
-          </a:bodyPr>
-          <a:lstStyle/>
-          <a:p>
-            <a:pPr indent="0" marL="0">
-              <a:buNone/>
-            </a:pPr>
-            <a:r>
-              <a:rPr lang="en-US" sz="1400" dirty="0">
-                <a:solidFill>
-                  <a:srgbClr val="374151"/>
-                </a:solidFill>
-                <a:latin typeface="Calibri" pitchFamily="34" charset="0"/>
-                <a:ea typeface="Calibri" pitchFamily="34" charset="-122"/>
-                <a:cs typeface="Calibri" pitchFamily="34" charset="-120"/>
-              </a:rPr>
-              <a:t>「誰が何を担当するのか」を明確化</a:t>
-            </a:r>
-            <a:endParaRPr lang="en-US" sz="1400" dirty="0"/>
-          </a:p>
-        </p:txBody>
-      </p:sp>
-      <p:sp>
-        <p:nvSpPr>
-          <p:cNvPr id="15" name="Text 13"/>
-          <p:cNvSpPr/>
-          <p:nvPr/>
-        </p:nvSpPr>
-        <p:spPr>
-          <a:xfrm>
-            <a:off x="1143000" y="2834640"/>
-            <a:ext cx="457200" cy="457200"/>
-          </a:xfrm>
-          <a:prstGeom prst="rect">
-            <a:avLst/>
-          </a:prstGeom>
-          <a:noFill/>
-          <a:ln/>
-        </p:spPr>
-        <p:txBody>
-          <a:bodyPr wrap="square" rtlCol="0" anchor="ctr">
-            <a:normAutofit/>
-          </a:bodyPr>
-          <a:lstStyle/>
-          <a:p>
-            <a:pPr indent="0" marL="0">
-              <a:buNone/>
-            </a:pPr>
-            <a:r>
-              <a:rPr lang="en-US" sz="2000" b="1" dirty="0">
-                <a:solidFill>
-                  <a:srgbClr val="2563EB"/>
-                </a:solidFill>
-                <a:latin typeface="Calibri" pitchFamily="34" charset="0"/>
-                <a:ea typeface="Calibri" pitchFamily="34" charset="-122"/>
-                <a:cs typeface="Calibri" pitchFamily="34" charset="-120"/>
-              </a:rPr>
-              <a:t>•</a:t>
-            </a:r>
-            <a:endParaRPr lang="en-US" sz="2000" dirty="0"/>
-          </a:p>
-        </p:txBody>
-      </p:sp>
-      <p:sp>
-        <p:nvSpPr>
-          <p:cNvPr id="16" name="Text 14"/>
-          <p:cNvSpPr/>
-          <p:nvPr/>
-        </p:nvSpPr>
-        <p:spPr>
-          <a:xfrm>
-            <a:off x="1691640" y="2834640"/>
-            <a:ext cx="6400800" cy="457200"/>
-          </a:xfrm>
-          <a:prstGeom prst="rect">
-            <a:avLst/>
-          </a:prstGeom>
-          <a:noFill/>
-          <a:ln/>
-        </p:spPr>
-        <p:txBody>
-          <a:bodyPr wrap="square" rtlCol="0" anchor="ctr">
-            <a:normAutofit/>
-          </a:bodyPr>
-          <a:lstStyle/>
-          <a:p>
-            <a:pPr indent="0" marL="0">
-              <a:buNone/>
-            </a:pPr>
-            <a:r>
-              <a:rPr lang="en-US" sz="1400" dirty="0">
-                <a:solidFill>
-                  <a:srgbClr val="374151"/>
-                </a:solidFill>
-                <a:latin typeface="Calibri" pitchFamily="34" charset="0"/>
-                <a:ea typeface="Calibri" pitchFamily="34" charset="-122"/>
-                <a:cs typeface="Calibri" pitchFamily="34" charset="-120"/>
-              </a:rPr>
-              <a:t>「次回までのアクション」をリスト化</a:t>
-            </a:r>
-            <a:endParaRPr lang="en-US" sz="1400" dirty="0"/>
-          </a:p>
-        </p:txBody>
-      </p:sp>
-      <p:sp>
-        <p:nvSpPr>
-          <p:cNvPr id="17" name="Text 15"/>
-          <p:cNvSpPr/>
-          <p:nvPr/>
-        </p:nvSpPr>
-        <p:spPr>
-          <a:xfrm>
-            <a:off x="1143000" y="3474720"/>
-            <a:ext cx="457200" cy="457200"/>
-          </a:xfrm>
-          <a:prstGeom prst="rect">
-            <a:avLst/>
-          </a:prstGeom>
-          <a:noFill/>
-          <a:ln/>
-        </p:spPr>
-        <p:txBody>
-          <a:bodyPr wrap="square" rtlCol="0" anchor="ctr">
-            <a:normAutofit/>
-          </a:bodyPr>
-          <a:lstStyle/>
-          <a:p>
-            <a:pPr indent="0" marL="0">
-              <a:buNone/>
-            </a:pPr>
-            <a:r>
-              <a:rPr lang="en-US" sz="2000" b="1" dirty="0">
-                <a:solidFill>
-                  <a:srgbClr val="2563EB"/>
-                </a:solidFill>
-                <a:latin typeface="Calibri" pitchFamily="34" charset="0"/>
-                <a:ea typeface="Calibri" pitchFamily="34" charset="-122"/>
-                <a:cs typeface="Calibri" pitchFamily="34" charset="-120"/>
-              </a:rPr>
-              <a:t>•</a:t>
-            </a:r>
-            <a:endParaRPr lang="en-US" sz="2000" dirty="0"/>
-          </a:p>
-        </p:txBody>
-      </p:sp>
-      <p:sp>
-        <p:nvSpPr>
-          <p:cNvPr id="18" name="Text 16"/>
-          <p:cNvSpPr/>
-          <p:nvPr/>
-        </p:nvSpPr>
-        <p:spPr>
-          <a:xfrm>
-            <a:off x="1691640" y="3474720"/>
-            <a:ext cx="6400800" cy="457200"/>
-          </a:xfrm>
-          <a:prstGeom prst="rect">
-            <a:avLst/>
-          </a:prstGeom>
-          <a:noFill/>
-          <a:ln/>
-        </p:spPr>
-        <p:txBody>
-          <a:bodyPr wrap="square" rtlCol="0" anchor="ctr">
-            <a:normAutofit/>
-          </a:bodyPr>
-          <a:lstStyle/>
-          <a:p>
-            <a:pPr indent="0" marL="0">
-              <a:buNone/>
-            </a:pPr>
-            <a:r>
-              <a:rPr lang="en-US" sz="1400" dirty="0">
-                <a:solidFill>
-                  <a:srgbClr val="374151"/>
-                </a:solidFill>
-                <a:latin typeface="Calibri" pitchFamily="34" charset="0"/>
-                <a:ea typeface="Calibri" pitchFamily="34" charset="-122"/>
-                <a:cs typeface="Calibri" pitchFamily="34" charset="-120"/>
-              </a:rPr>
-              <a:t>見やすい形式で自動まとめ</a:t>
-            </a:r>
-            <a:endParaRPr lang="en-US" sz="1400" dirty="0"/>
-          </a:p>
-        </p:txBody>
-      </p:sp>
-      <p:sp>
-        <p:nvSpPr>
-          <p:cNvPr id="19" name="Shape 17"/>
-          <p:cNvSpPr/>
-          <p:nvPr/>
-        </p:nvSpPr>
-        <p:spPr>
-          <a:xfrm>
-            <a:off x="685800" y="3931920"/>
-            <a:ext cx="7772400" cy="365760"/>
-          </a:xfrm>
-          <a:prstGeom prst="rect">
-            <a:avLst>
-              <a:gd name="adj" fmla="val 10000"/>
-            </a:avLst>
-          </a:prstGeom>
-          <a:solidFill>
-            <a:srgbClr val="DBEAFE"/>
-          </a:solidFill>
-          <a:ln/>
-        </p:spPr>
-      </p:sp>
-      <p:sp>
-        <p:nvSpPr>
-          <p:cNvPr id="20" name="Text 18"/>
-          <p:cNvSpPr/>
-          <p:nvPr/>
-        </p:nvSpPr>
-        <p:spPr>
-          <a:xfrm>
-            <a:off x="822960" y="3931920"/>
-            <a:ext cx="7498080" cy="365760"/>
-          </a:xfrm>
-          <a:prstGeom prst="rect">
-            <a:avLst/>
-          </a:prstGeom>
-          <a:noFill/>
-          <a:ln/>
-        </p:spPr>
-        <p:txBody>
-          <a:bodyPr wrap="square" rtlCol="0" anchor="ctr">
-            <a:normAutofit/>
-          </a:bodyPr>
-          <a:lstStyle/>
-          <a:p>
-            <a:pPr indent="0" marL="0">
-              <a:buNone/>
-            </a:pPr>
-            <a:r>
-              <a:rPr lang="en-US" sz="1200" i="1" dirty="0">
-                <a:solidFill>
-                  <a:srgbClr val="6B7280"/>
-                </a:solidFill>
-                <a:latin typeface="Calibri" pitchFamily="34" charset="0"/>
-                <a:ea typeface="Calibri" pitchFamily="34" charset="-122"/>
-                <a:cs typeface="Calibri" pitchFamily="34" charset="-120"/>
-              </a:rPr>
-              <a:t>手動議事録作成の時間がゼロになり、会議に集中できる</a:t>
-            </a:r>
-            <a:endParaRPr lang="en-US" sz="1200" dirty="0"/>
           </a:p>
         </p:txBody>
       </p:sp>
@@ -8215,7 +7441,7 @@
         <p:spPr>
           <a:xfrm>
             <a:off x="685800" y="137160"/>
-            <a:ext cx="804672" cy="256032"/>
+            <a:ext cx="1901952" cy="256032"/>
           </a:xfrm>
           <a:prstGeom prst="rect">
             <a:avLst>
@@ -8237,7 +7463,7 @@
         <p:spPr>
           <a:xfrm>
             <a:off x="685800" y="137160"/>
-            <a:ext cx="804672" cy="256032"/>
+            <a:ext cx="1901952" cy="256032"/>
           </a:xfrm>
           <a:prstGeom prst="rect">
             <a:avLst/>
@@ -8263,7 +7489,7 @@
                 <a:ea typeface="Calibri" pitchFamily="34" charset="-122"/>
                 <a:cs typeface="Calibri" pitchFamily="34" charset="-120"/>
               </a:rPr>
-              <a:t>MEET</a:t>
+              <a:t>BEST PRACTICES</a:t>
             </a:r>
             <a:endParaRPr lang="en-US" sz="1000" dirty="0"/>
           </a:p>
@@ -8304,7 +7530,7 @@
                 <a:ea typeface="Calibri" pitchFamily="34" charset="-122"/>
                 <a:cs typeface="Calibri" pitchFamily="34" charset="-120"/>
               </a:rPr>
-              <a:t>Google Meet 統合② 重要ポイント優先度抽出</a:t>
+              <a:t>使う時のポイント</a:t>
             </a:r>
             <a:endParaRPr lang="en-US" sz="2400" dirty="0"/>
           </a:p>
@@ -8417,30 +7643,44 @@
       </p:sp>
       <p:sp>
         <p:nvSpPr>
-          <p:cNvPr id="9" name="Shape 7"/>
-          <p:cNvSpPr/>
-          <p:nvPr/>
-        </p:nvSpPr>
-        <p:spPr>
-          <a:xfrm>
-            <a:off x="868680" y="914400"/>
-            <a:ext cx="2286000" cy="1645920"/>
-          </a:xfrm>
-          <a:prstGeom prst="rect">
-            <a:avLst>
-              <a:gd name="adj" fmla="val 2778"/>
-            </a:avLst>
-          </a:prstGeom>
-          <a:solidFill>
-            <a:srgbClr val="FEE2E2"/>
-          </a:solidFill>
-          <a:ln w="12700">
-            <a:solidFill>
-              <a:srgbClr val="DC2626"/>
-            </a:solidFill>
-            <a:prstDash val="solid"/>
-          </a:ln>
-        </p:spPr>
+          <p:cNvPr id="9" name="Text 7"/>
+          <p:cNvSpPr/>
+          <p:nvPr/>
+        </p:nvSpPr>
+        <p:spPr>
+          <a:xfrm>
+            <a:off x="960120" y="822960"/>
+            <a:ext cx="1828800" cy="274320"/>
+          </a:xfrm>
+          <a:prstGeom prst="rect">
+            <a:avLst/>
+          </a:prstGeom>
+          <a:noFill/>
+          <a:ln/>
+        </p:spPr>
+        <p:txBody>
+          <a:bodyPr wrap="square" rtlCol="0" anchor="ctr">
+            <a:normAutofit/>
+          </a:bodyPr>
+          <a:lstStyle/>
+          <a:p>
+            <a:pPr indent="0" marL="0">
+              <a:buNone/>
+            </a:pPr>
+            <a:r>
+              <a:rPr lang="en-US" sz="1600" b="1" dirty="0">
+                <a:solidFill>
+                  <a:srgbClr val="059669"/>
+                </a:solidFill>
+                <a:latin typeface="Calibri" pitchFamily="34" charset="0"/>
+                <a:ea typeface="Calibri" pitchFamily="34" charset="-122"/>
+                <a:cs typeface="Calibri" pitchFamily="34" charset="-120"/>
+              </a:rPr>
+              <a:t>✓ 生成案は確認してから送信</a:t>
+            </a:r>
+            <a:endParaRPr lang="en-US" sz="1600" dirty="0"/>
+          </a:p>
+        </p:txBody>
       </p:sp>
       <p:sp>
         <p:nvSpPr>
@@ -8450,51 +7690,157 @@
         </p:nvSpPr>
         <p:spPr>
           <a:xfrm>
-            <a:off x="868680" y="1143000"/>
-            <a:ext cx="2286000" cy="320040"/>
-          </a:xfrm>
-          <a:prstGeom prst="rect">
-            <a:avLst/>
-          </a:prstGeom>
-          <a:noFill/>
-          <a:ln/>
-        </p:spPr>
-        <p:txBody>
-          <a:bodyPr wrap="square" rtlCol="0" anchor="ctr">
-            <a:normAutofit/>
-          </a:bodyPr>
-          <a:lstStyle/>
-          <a:p>
-            <a:pPr algn="ctr" indent="0" marL="0">
+            <a:off x="2971800" y="822960"/>
+            <a:ext cx="5669280" cy="320040"/>
+          </a:xfrm>
+          <a:prstGeom prst="rect">
+            <a:avLst/>
+          </a:prstGeom>
+          <a:noFill/>
+          <a:ln/>
+        </p:spPr>
+        <p:txBody>
+          <a:bodyPr wrap="square" rtlCol="0" anchor="ctr">
+            <a:normAutofit/>
+          </a:bodyPr>
+          <a:lstStyle/>
+          <a:p>
+            <a:pPr indent="0" marL="0">
+              <a:buNone/>
+            </a:pPr>
+            <a:r>
+              <a:rPr lang="en-US" sz="1200" dirty="0">
+                <a:solidFill>
+                  <a:srgbClr val="374151"/>
+                </a:solidFill>
+                <a:latin typeface="Calibri" pitchFamily="34" charset="0"/>
+                <a:ea typeface="Calibri" pitchFamily="34" charset="-122"/>
+                <a:cs typeface="Calibri" pitchFamily="34" charset="-120"/>
+              </a:rPr>
+              <a:t>AI が作ったものを『確認』『微調整』するステップが重要</a:t>
+            </a:r>
+            <a:endParaRPr lang="en-US" sz="1200" dirty="0"/>
+          </a:p>
+        </p:txBody>
+      </p:sp>
+      <p:sp>
+        <p:nvSpPr>
+          <p:cNvPr id="11" name="Text 9"/>
+          <p:cNvSpPr/>
+          <p:nvPr/>
+        </p:nvSpPr>
+        <p:spPr>
+          <a:xfrm>
+            <a:off x="960120" y="1691640"/>
+            <a:ext cx="1828800" cy="274320"/>
+          </a:xfrm>
+          <a:prstGeom prst="rect">
+            <a:avLst/>
+          </a:prstGeom>
+          <a:noFill/>
+          <a:ln/>
+        </p:spPr>
+        <p:txBody>
+          <a:bodyPr wrap="square" rtlCol="0" anchor="ctr">
+            <a:normAutofit/>
+          </a:bodyPr>
+          <a:lstStyle/>
+          <a:p>
+            <a:pPr indent="0" marL="0">
               <a:buNone/>
             </a:pPr>
             <a:r>
               <a:rPr lang="en-US" sz="1600" b="1" dirty="0">
                 <a:solidFill>
-                  <a:srgbClr val="DC2626"/>
-                </a:solidFill>
-                <a:latin typeface="Calibri" pitchFamily="34" charset="0"/>
-                <a:ea typeface="Calibri" pitchFamily="34" charset="-122"/>
-                <a:cs typeface="Calibri" pitchFamily="34" charset="-120"/>
-              </a:rPr>
-              <a:t>今すぐ対応</a:t>
+                  <a:srgbClr val="059669"/>
+                </a:solidFill>
+                <a:latin typeface="Calibri" pitchFamily="34" charset="0"/>
+                <a:ea typeface="Calibri" pitchFamily="34" charset="-122"/>
+                <a:cs typeface="Calibri" pitchFamily="34" charset="-120"/>
+              </a:rPr>
+              <a:t>✓ 機密情報を入力する時は注意</a:t>
             </a:r>
             <a:endParaRPr lang="en-US" sz="1600" dirty="0"/>
           </a:p>
-          <a:p>
-            <a:pPr algn="ctr" indent="0" marL="0">
+        </p:txBody>
+      </p:sp>
+      <p:sp>
+        <p:nvSpPr>
+          <p:cNvPr id="12" name="Text 10"/>
+          <p:cNvSpPr/>
+          <p:nvPr/>
+        </p:nvSpPr>
+        <p:spPr>
+          <a:xfrm>
+            <a:off x="2971800" y="1691640"/>
+            <a:ext cx="5669280" cy="320040"/>
+          </a:xfrm>
+          <a:prstGeom prst="rect">
+            <a:avLst/>
+          </a:prstGeom>
+          <a:noFill/>
+          <a:ln/>
+        </p:spPr>
+        <p:txBody>
+          <a:bodyPr wrap="square" rtlCol="0" anchor="ctr">
+            <a:normAutofit/>
+          </a:bodyPr>
+          <a:lstStyle/>
+          <a:p>
+            <a:pPr indent="0" marL="0">
+              <a:buNone/>
+            </a:pPr>
+            <a:r>
+              <a:rPr lang="en-US" sz="1200" dirty="0">
+                <a:solidFill>
+                  <a:srgbClr val="374151"/>
+                </a:solidFill>
+                <a:latin typeface="Calibri" pitchFamily="34" charset="0"/>
+                <a:ea typeface="Calibri" pitchFamily="34" charset="-122"/>
+                <a:cs typeface="Calibri" pitchFamily="34" charset="-120"/>
+              </a:rPr>
+              <a:t>顧客情報・社外秘の内容は事前に確認・同意を得てから</a:t>
+            </a:r>
+            <a:endParaRPr lang="en-US" sz="1200" dirty="0"/>
+          </a:p>
+        </p:txBody>
+      </p:sp>
+      <p:sp>
+        <p:nvSpPr>
+          <p:cNvPr id="13" name="Text 11"/>
+          <p:cNvSpPr/>
+          <p:nvPr/>
+        </p:nvSpPr>
+        <p:spPr>
+          <a:xfrm>
+            <a:off x="960120" y="2560320"/>
+            <a:ext cx="1828800" cy="274320"/>
+          </a:xfrm>
+          <a:prstGeom prst="rect">
+            <a:avLst/>
+          </a:prstGeom>
+          <a:noFill/>
+          <a:ln/>
+        </p:spPr>
+        <p:txBody>
+          <a:bodyPr wrap="square" rtlCol="0" anchor="ctr">
+            <a:normAutofit/>
+          </a:bodyPr>
+          <a:lstStyle/>
+          <a:p>
+            <a:pPr indent="0" marL="0">
               <a:buNone/>
             </a:pPr>
             <a:r>
               <a:rPr lang="en-US" sz="1600" b="1" dirty="0">
                 <a:solidFill>
-                  <a:srgbClr val="DC2626"/>
-                </a:solidFill>
-                <a:latin typeface="Calibri" pitchFamily="34" charset="0"/>
-                <a:ea typeface="Calibri" pitchFamily="34" charset="-122"/>
-                <a:cs typeface="Calibri" pitchFamily="34" charset="-120"/>
-              </a:rPr>
-              <a:t>決定事項</a:t>
+                  <a:srgbClr val="059669"/>
+                </a:solidFill>
+                <a:latin typeface="Calibri" pitchFamily="34" charset="0"/>
+                <a:ea typeface="Calibri" pitchFamily="34" charset="-122"/>
+                <a:cs typeface="Calibri" pitchFamily="34" charset="-120"/>
+              </a:rPr>
+              <a:t>✓ ドライブに『テンプレート』を用意</a:t>
             </a:r>
             <a:endParaRPr lang="en-US" sz="1600" dirty="0"/>
           </a:p>
@@ -8502,35 +7848,32 @@
       </p:sp>
       <p:sp>
         <p:nvSpPr>
-          <p:cNvPr id="11" name="Text 9"/>
-          <p:cNvSpPr/>
-          <p:nvPr/>
-        </p:nvSpPr>
-        <p:spPr>
-          <a:xfrm>
-            <a:off x="1005840" y="1508760"/>
-            <a:ext cx="2011680" cy="868680"/>
-          </a:xfrm>
-          <a:prstGeom prst="rect">
-            <a:avLst/>
-          </a:prstGeom>
-          <a:noFill/>
-          <a:ln/>
-        </p:spPr>
-        <p:txBody>
-          <a:bodyPr wrap="square" rtlCol="0" anchor="ctr">
-            <a:normAutofit/>
-          </a:bodyPr>
-          <a:lstStyle/>
-          <a:p>
-            <a:pPr algn="ctr" indent="0" marL="0">
-              <a:lnSpc>
-                <a:spcPct val="130000"/>
-              </a:lnSpc>
-              <a:buNone/>
-            </a:pPr>
-            <a:r>
-              <a:rPr lang="en-US" sz="1400" dirty="0">
+          <p:cNvPr id="14" name="Text 12"/>
+          <p:cNvSpPr/>
+          <p:nvPr/>
+        </p:nvSpPr>
+        <p:spPr>
+          <a:xfrm>
+            <a:off x="2971800" y="2560320"/>
+            <a:ext cx="5669280" cy="320040"/>
+          </a:xfrm>
+          <a:prstGeom prst="rect">
+            <a:avLst/>
+          </a:prstGeom>
+          <a:noFill/>
+          <a:ln/>
+        </p:spPr>
+        <p:txBody>
+          <a:bodyPr wrap="square" rtlCol="0" anchor="ctr">
+            <a:normAutofit/>
+          </a:bodyPr>
+          <a:lstStyle/>
+          <a:p>
+            <a:pPr indent="0" marL="0">
+              <a:buNone/>
+            </a:pPr>
+            <a:r>
+              <a:rPr lang="en-US" sz="1200" dirty="0">
                 <a:solidFill>
                   <a:srgbClr val="374151"/>
                 </a:solidFill>
@@ -8538,19 +7881,81 @@
                 <a:ea typeface="Calibri" pitchFamily="34" charset="-122"/>
                 <a:cs typeface="Calibri" pitchFamily="34" charset="-120"/>
               </a:rPr>
-              <a:t>即座に実行が必要な</a:t>
-            </a:r>
-            <a:endParaRPr lang="en-US" sz="1400" dirty="0"/>
-          </a:p>
-          <a:p>
-            <a:pPr algn="ctr" indent="0" marL="0">
-              <a:lnSpc>
-                <a:spcPct val="130000"/>
-              </a:lnSpc>
-              <a:buNone/>
-            </a:pPr>
-            <a:r>
-              <a:rPr lang="en-US" sz="1400" dirty="0">
+              <a:t>AI が参照する基本フォーマットがあると、生成精度が大幅アップ</a:t>
+            </a:r>
+            <a:endParaRPr lang="en-US" sz="1200" dirty="0"/>
+          </a:p>
+        </p:txBody>
+      </p:sp>
+      <p:sp>
+        <p:nvSpPr>
+          <p:cNvPr id="15" name="Text 13"/>
+          <p:cNvSpPr/>
+          <p:nvPr/>
+        </p:nvSpPr>
+        <p:spPr>
+          <a:xfrm>
+            <a:off x="960120" y="3429000"/>
+            <a:ext cx="1828800" cy="274320"/>
+          </a:xfrm>
+          <a:prstGeom prst="rect">
+            <a:avLst/>
+          </a:prstGeom>
+          <a:noFill/>
+          <a:ln/>
+        </p:spPr>
+        <p:txBody>
+          <a:bodyPr wrap="square" rtlCol="0" anchor="ctr">
+            <a:normAutofit/>
+          </a:bodyPr>
+          <a:lstStyle/>
+          <a:p>
+            <a:pPr indent="0" marL="0">
+              <a:buNone/>
+            </a:pPr>
+            <a:r>
+              <a:rPr lang="en-US" sz="1600" b="1" dirty="0">
+                <a:solidFill>
+                  <a:srgbClr val="059669"/>
+                </a:solidFill>
+                <a:latin typeface="Calibri" pitchFamily="34" charset="0"/>
+                <a:ea typeface="Calibri" pitchFamily="34" charset="-122"/>
+                <a:cs typeface="Calibri" pitchFamily="34" charset="-120"/>
+              </a:rPr>
+              <a:t>✓ 定期的に手動修正の例を学習させる</a:t>
+            </a:r>
+            <a:endParaRPr lang="en-US" sz="1600" dirty="0"/>
+          </a:p>
+        </p:txBody>
+      </p:sp>
+      <p:sp>
+        <p:nvSpPr>
+          <p:cNvPr id="16" name="Text 14"/>
+          <p:cNvSpPr/>
+          <p:nvPr/>
+        </p:nvSpPr>
+        <p:spPr>
+          <a:xfrm>
+            <a:off x="2971800" y="3429000"/>
+            <a:ext cx="5669280" cy="320040"/>
+          </a:xfrm>
+          <a:prstGeom prst="rect">
+            <a:avLst/>
+          </a:prstGeom>
+          <a:noFill/>
+          <a:ln/>
+        </p:spPr>
+        <p:txBody>
+          <a:bodyPr wrap="square" rtlCol="0" anchor="ctr">
+            <a:normAutofit/>
+          </a:bodyPr>
+          <a:lstStyle/>
+          <a:p>
+            <a:pPr indent="0" marL="0">
+              <a:buNone/>
+            </a:pPr>
+            <a:r>
+              <a:rPr lang="en-US" sz="1200" dirty="0">
                 <a:solidFill>
                   <a:srgbClr val="374151"/>
                 </a:solidFill>
@@ -8558,371 +7963,9 @@
                 <a:ea typeface="Calibri" pitchFamily="34" charset="-122"/>
                 <a:cs typeface="Calibri" pitchFamily="34" charset="-120"/>
               </a:rPr>
-              <a:t>意思決定・承認事項</a:t>
-            </a:r>
-            <a:endParaRPr lang="en-US" sz="1400" dirty="0"/>
-          </a:p>
-        </p:txBody>
-      </p:sp>
-      <p:sp>
-        <p:nvSpPr>
-          <p:cNvPr id="12" name="Shape 10"/>
-          <p:cNvSpPr/>
-          <p:nvPr/>
-        </p:nvSpPr>
-        <p:spPr>
-          <a:xfrm>
-            <a:off x="3429000" y="914400"/>
-            <a:ext cx="2286000" cy="1645920"/>
-          </a:xfrm>
-          <a:prstGeom prst="rect">
-            <a:avLst>
-              <a:gd name="adj" fmla="val 2778"/>
-            </a:avLst>
-          </a:prstGeom>
-          <a:solidFill>
-            <a:srgbClr val="FEF3C7"/>
-          </a:solidFill>
-          <a:ln w="12700">
-            <a:solidFill>
-              <a:srgbClr val="D97706"/>
-            </a:solidFill>
-            <a:prstDash val="solid"/>
-          </a:ln>
-        </p:spPr>
-      </p:sp>
-      <p:sp>
-        <p:nvSpPr>
-          <p:cNvPr id="13" name="Text 11"/>
-          <p:cNvSpPr/>
-          <p:nvPr/>
-        </p:nvSpPr>
-        <p:spPr>
-          <a:xfrm>
-            <a:off x="3429000" y="1143000"/>
-            <a:ext cx="2286000" cy="320040"/>
-          </a:xfrm>
-          <a:prstGeom prst="rect">
-            <a:avLst/>
-          </a:prstGeom>
-          <a:noFill/>
-          <a:ln/>
-        </p:spPr>
-        <p:txBody>
-          <a:bodyPr wrap="square" rtlCol="0" anchor="ctr">
-            <a:normAutofit/>
-          </a:bodyPr>
-          <a:lstStyle/>
-          <a:p>
-            <a:pPr algn="ctr" indent="0" marL="0">
-              <a:buNone/>
-            </a:pPr>
-            <a:r>
-              <a:rPr lang="en-US" sz="1600" b="1" dirty="0">
-                <a:solidFill>
-                  <a:srgbClr val="D97706"/>
-                </a:solidFill>
-                <a:latin typeface="Calibri" pitchFamily="34" charset="0"/>
-                <a:ea typeface="Calibri" pitchFamily="34" charset="-122"/>
-                <a:cs typeface="Calibri" pitchFamily="34" charset="-120"/>
-              </a:rPr>
-              <a:t>情報共有</a:t>
-            </a:r>
-            <a:endParaRPr lang="en-US" sz="1600" dirty="0"/>
-          </a:p>
-          <a:p>
-            <a:pPr algn="ctr" indent="0" marL="0">
-              <a:buNone/>
-            </a:pPr>
-            <a:r>
-              <a:rPr lang="en-US" sz="1600" b="1" dirty="0">
-                <a:solidFill>
-                  <a:srgbClr val="D97706"/>
-                </a:solidFill>
-                <a:latin typeface="Calibri" pitchFamily="34" charset="0"/>
-                <a:ea typeface="Calibri" pitchFamily="34" charset="-122"/>
-                <a:cs typeface="Calibri" pitchFamily="34" charset="-120"/>
-              </a:rPr>
-              <a:t>事項</a:t>
-            </a:r>
-            <a:endParaRPr lang="en-US" sz="1600" dirty="0"/>
-          </a:p>
-        </p:txBody>
-      </p:sp>
-      <p:sp>
-        <p:nvSpPr>
-          <p:cNvPr id="14" name="Text 12"/>
-          <p:cNvSpPr/>
-          <p:nvPr/>
-        </p:nvSpPr>
-        <p:spPr>
-          <a:xfrm>
-            <a:off x="3566160" y="1508760"/>
-            <a:ext cx="2011680" cy="868680"/>
-          </a:xfrm>
-          <a:prstGeom prst="rect">
-            <a:avLst/>
-          </a:prstGeom>
-          <a:noFill/>
-          <a:ln/>
-        </p:spPr>
-        <p:txBody>
-          <a:bodyPr wrap="square" rtlCol="0" anchor="ctr">
-            <a:normAutofit/>
-          </a:bodyPr>
-          <a:lstStyle/>
-          <a:p>
-            <a:pPr algn="ctr" indent="0" marL="0">
-              <a:lnSpc>
-                <a:spcPct val="130000"/>
-              </a:lnSpc>
-              <a:buNone/>
-            </a:pPr>
-            <a:r>
-              <a:rPr lang="en-US" sz="1400" dirty="0">
-                <a:solidFill>
-                  <a:srgbClr val="374151"/>
-                </a:solidFill>
-                <a:latin typeface="Calibri" pitchFamily="34" charset="0"/>
-                <a:ea typeface="Calibri" pitchFamily="34" charset="-122"/>
-                <a:cs typeface="Calibri" pitchFamily="34" charset="-120"/>
-              </a:rPr>
-              <a:t>FYI（参考情報）</a:t>
-            </a:r>
-            <a:endParaRPr lang="en-US" sz="1400" dirty="0"/>
-          </a:p>
-          <a:p>
-            <a:pPr algn="ctr" indent="0" marL="0">
-              <a:lnSpc>
-                <a:spcPct val="130000"/>
-              </a:lnSpc>
-              <a:buNone/>
-            </a:pPr>
-            <a:r>
-              <a:rPr lang="en-US" sz="1400" dirty="0">
-                <a:solidFill>
-                  <a:srgbClr val="374151"/>
-                </a:solidFill>
-                <a:latin typeface="Calibri" pitchFamily="34" charset="0"/>
-                <a:ea typeface="Calibri" pitchFamily="34" charset="-122"/>
-                <a:cs typeface="Calibri" pitchFamily="34" charset="-120"/>
-              </a:rPr>
-              <a:t>提供・報告事項</a:t>
-            </a:r>
-            <a:endParaRPr lang="en-US" sz="1400" dirty="0"/>
-          </a:p>
-        </p:txBody>
-      </p:sp>
-      <p:sp>
-        <p:nvSpPr>
-          <p:cNvPr id="15" name="Shape 13"/>
-          <p:cNvSpPr/>
-          <p:nvPr/>
-        </p:nvSpPr>
-        <p:spPr>
-          <a:xfrm>
-            <a:off x="5989320" y="914400"/>
-            <a:ext cx="2286000" cy="1645920"/>
-          </a:xfrm>
-          <a:prstGeom prst="rect">
-            <a:avLst>
-              <a:gd name="adj" fmla="val 2778"/>
-            </a:avLst>
-          </a:prstGeom>
-          <a:solidFill>
-            <a:srgbClr val="D1FAE5"/>
-          </a:solidFill>
-          <a:ln w="12700">
-            <a:solidFill>
-              <a:srgbClr val="059669"/>
-            </a:solidFill>
-            <a:prstDash val="solid"/>
-          </a:ln>
-        </p:spPr>
-      </p:sp>
-      <p:sp>
-        <p:nvSpPr>
-          <p:cNvPr id="16" name="Text 14"/>
-          <p:cNvSpPr/>
-          <p:nvPr/>
-        </p:nvSpPr>
-        <p:spPr>
-          <a:xfrm>
-            <a:off x="5989320" y="1143000"/>
-            <a:ext cx="2286000" cy="320040"/>
-          </a:xfrm>
-          <a:prstGeom prst="rect">
-            <a:avLst/>
-          </a:prstGeom>
-          <a:noFill/>
-          <a:ln/>
-        </p:spPr>
-        <p:txBody>
-          <a:bodyPr wrap="square" rtlCol="0" anchor="ctr">
-            <a:normAutofit/>
-          </a:bodyPr>
-          <a:lstStyle/>
-          <a:p>
-            <a:pPr algn="ctr" indent="0" marL="0">
-              <a:buNone/>
-            </a:pPr>
-            <a:r>
-              <a:rPr lang="en-US" sz="1600" b="1" dirty="0">
-                <a:solidFill>
-                  <a:srgbClr val="059669"/>
-                </a:solidFill>
-                <a:latin typeface="Calibri" pitchFamily="34" charset="0"/>
-                <a:ea typeface="Calibri" pitchFamily="34" charset="-122"/>
-                <a:cs typeface="Calibri" pitchFamily="34" charset="-120"/>
-              </a:rPr>
-              <a:t>今後の</a:t>
-            </a:r>
-            <a:endParaRPr lang="en-US" sz="1600" dirty="0"/>
-          </a:p>
-          <a:p>
-            <a:pPr algn="ctr" indent="0" marL="0">
-              <a:buNone/>
-            </a:pPr>
-            <a:r>
-              <a:rPr lang="en-US" sz="1600" b="1" dirty="0">
-                <a:solidFill>
-                  <a:srgbClr val="059669"/>
-                </a:solidFill>
-                <a:latin typeface="Calibri" pitchFamily="34" charset="0"/>
-                <a:ea typeface="Calibri" pitchFamily="34" charset="-122"/>
-                <a:cs typeface="Calibri" pitchFamily="34" charset="-120"/>
-              </a:rPr>
-              <a:t>検討項目</a:t>
-            </a:r>
-            <a:endParaRPr lang="en-US" sz="1600" dirty="0"/>
-          </a:p>
-        </p:txBody>
-      </p:sp>
-      <p:sp>
-        <p:nvSpPr>
-          <p:cNvPr id="17" name="Text 15"/>
-          <p:cNvSpPr/>
-          <p:nvPr/>
-        </p:nvSpPr>
-        <p:spPr>
-          <a:xfrm>
-            <a:off x="6126480" y="1508760"/>
-            <a:ext cx="2011680" cy="868680"/>
-          </a:xfrm>
-          <a:prstGeom prst="rect">
-            <a:avLst/>
-          </a:prstGeom>
-          <a:noFill/>
-          <a:ln/>
-        </p:spPr>
-        <p:txBody>
-          <a:bodyPr wrap="square" rtlCol="0" anchor="ctr">
-            <a:normAutofit/>
-          </a:bodyPr>
-          <a:lstStyle/>
-          <a:p>
-            <a:pPr algn="ctr" indent="0" marL="0">
-              <a:lnSpc>
-                <a:spcPct val="130000"/>
-              </a:lnSpc>
-              <a:buNone/>
-            </a:pPr>
-            <a:r>
-              <a:rPr lang="en-US" sz="1400" dirty="0">
-                <a:solidFill>
-                  <a:srgbClr val="374151"/>
-                </a:solidFill>
-                <a:latin typeface="Calibri" pitchFamily="34" charset="0"/>
-                <a:ea typeface="Calibri" pitchFamily="34" charset="-122"/>
-                <a:cs typeface="Calibri" pitchFamily="34" charset="-120"/>
-              </a:rPr>
-              <a:t>次の会議までに</a:t>
-            </a:r>
-            <a:endParaRPr lang="en-US" sz="1400" dirty="0"/>
-          </a:p>
-          <a:p>
-            <a:pPr algn="ctr" indent="0" marL="0">
-              <a:lnSpc>
-                <a:spcPct val="130000"/>
-              </a:lnSpc>
-              <a:buNone/>
-            </a:pPr>
-            <a:r>
-              <a:rPr lang="en-US" sz="1400" dirty="0">
-                <a:solidFill>
-                  <a:srgbClr val="374151"/>
-                </a:solidFill>
-                <a:latin typeface="Calibri" pitchFamily="34" charset="0"/>
-                <a:ea typeface="Calibri" pitchFamily="34" charset="-122"/>
-                <a:cs typeface="Calibri" pitchFamily="34" charset="-120"/>
-              </a:rPr>
-              <a:t>検討する項目</a:t>
-            </a:r>
-            <a:endParaRPr lang="en-US" sz="1400" dirty="0"/>
-          </a:p>
-        </p:txBody>
-      </p:sp>
-      <p:sp>
-        <p:nvSpPr>
-          <p:cNvPr id="18" name="Text 16"/>
-          <p:cNvSpPr/>
-          <p:nvPr/>
-        </p:nvSpPr>
-        <p:spPr>
-          <a:xfrm>
-            <a:off x="685800" y="2834640"/>
-            <a:ext cx="7772400" cy="548640"/>
-          </a:xfrm>
-          <a:prstGeom prst="rect">
-            <a:avLst/>
-          </a:prstGeom>
-          <a:noFill/>
-          <a:ln/>
-        </p:spPr>
-        <p:txBody>
-          <a:bodyPr wrap="square" rtlCol="0" anchor="ctr">
-            <a:normAutofit/>
-          </a:bodyPr>
-          <a:lstStyle/>
-          <a:p>
-            <a:pPr algn="ctr" indent="0" marL="0">
-              <a:lnSpc>
-                <a:spcPct val="120000"/>
-              </a:lnSpc>
-              <a:buNone/>
-            </a:pPr>
-            <a:r>
-              <a:rPr lang="en-US" sz="1400" b="1" dirty="0">
-                <a:solidFill>
-                  <a:srgbClr val="111827"/>
-                </a:solidFill>
-                <a:latin typeface="Calibri" pitchFamily="34" charset="0"/>
-                <a:ea typeface="Calibri" pitchFamily="34" charset="-122"/>
-                <a:cs typeface="Calibri" pitchFamily="34" charset="-120"/>
-              </a:rPr>
-              <a:t>1時間の会議から 3つのカテゴリに自動分類</a:t>
-            </a:r>
-            <a:endParaRPr lang="en-US" sz="1400" dirty="0"/>
-          </a:p>
-          <a:p>
-            <a:pPr algn="ctr" indent="0" marL="0">
-              <a:lnSpc>
-                <a:spcPct val="120000"/>
-              </a:lnSpc>
-              <a:buNone/>
-            </a:pPr>
-            <a:r>
-              <a:rPr lang="en-US" sz="1400" b="1" dirty="0">
-                <a:solidFill>
-                  <a:srgbClr val="111827"/>
-                </a:solidFill>
-                <a:latin typeface="Calibri" pitchFamily="34" charset="0"/>
-                <a:ea typeface="Calibri" pitchFamily="34" charset="-122"/>
-                <a:cs typeface="Calibri" pitchFamily="34" charset="-120"/>
-              </a:rPr>
-              <a:t>→ 会議後のアクションプランがすぐに明確に</a:t>
-            </a:r>
-            <a:endParaRPr lang="en-US" sz="1400" dirty="0"/>
+              <a:t>Workspace 管理者が『標準的な表現』を定義していく</a:t>
+            </a:r>
+            <a:endParaRPr lang="en-US" sz="1200" dirty="0"/>
           </a:p>
         </p:txBody>
       </p:sp>

--- a/黒崎/AI研修一覧/Gemini/P-02_Workspace_統合実演/スライド.pptx
+++ b/黒崎/AI研修一覧/Gemini/P-02_Workspace_統合実演/スライド.pptx
@@ -3087,47 +3087,6 @@
           </a:p>
         </p:txBody>
       </p:sp>
-      <p:sp>
-        <p:nvSpPr>
-          <p:cNvPr id="12" name="Text 10"/>
-          <p:cNvSpPr/>
-          <p:nvPr/>
-        </p:nvSpPr>
-        <p:spPr>
-          <a:xfrm>
-            <a:off x="685800" y="4796028"/>
-            <a:ext cx="1828800" cy="274320"/>
-          </a:xfrm>
-          <a:prstGeom prst="rect">
-            <a:avLst/>
-          </a:prstGeom>
-          <a:noFill/>
-          <a:ln/>
-        </p:spPr>
-        <p:txBody>
-          <a:bodyPr wrap="square" rtlCol="0" anchor="ctr">
-            <a:normAutofit/>
-          </a:bodyPr>
-          <a:lstStyle/>
-          <a:p>
-            <a:pPr algn="l" indent="0" marL="0">
-              <a:buNone/>
-            </a:pPr>
-            <a:r>
-              <a:rPr lang="en-US" sz="1000" dirty="0">
-                <a:solidFill>
-                  <a:srgbClr val="9CA3AF"/>
-                </a:solidFill>
-                <a:latin typeface="Calibri" pitchFamily="34" charset="0"/>
-                <a:ea typeface="Calibri" pitchFamily="34" charset="-122"/>
-                <a:cs typeface="Calibri" pitchFamily="34" charset="-120"/>
-              </a:rPr>
-              <a:t>P-02</a:t>
-            </a:r>
-            <a:endParaRPr lang="en-US" sz="1000" dirty="0"/>
-          </a:p>
-        </p:txBody>
-      </p:sp>
     </p:spTree>
   </p:cSld>
   <p:clrMapOvr>
